--- a/template.pptx.pptx
+++ b/template.pptx.pptx
@@ -3876,7 +3876,7 @@
       </p:pic>
       <p:graphicFrame>
         <p:nvGraphicFramePr>
-          <p:cNvPr id="16" name="chart_strategy">
+          <p:cNvPr id="16" name="chart_phase">
             <a:extLst>
               <a:ext uri="{FF2B5EF4-FFF2-40B4-BE49-F238E27FC236}">
                 <a16:creationId xmlns:a16="http://schemas.microsoft.com/office/drawing/2014/main" id="{E3FBC192-41E3-EE9C-5C68-F9F04489C9C4}"/>
@@ -3887,7 +3887,7 @@
           <p:nvPr>
             <p:extLst>
               <p:ext uri="{D42A27DB-BD31-4B8C-83A1-F6EECF244321}">
-                <p14:modId xmlns:p14="http://schemas.microsoft.com/office/powerpoint/2010/main" val="2255647868"/>
+                <p14:modId xmlns:p14="http://schemas.microsoft.com/office/powerpoint/2010/main" val="4217518274"/>
               </p:ext>
             </p:extLst>
           </p:nvPr>
@@ -4463,7 +4463,7 @@
       </p:cxnSp>
       <p:graphicFrame>
         <p:nvGraphicFramePr>
-          <p:cNvPr id="22" name="chart_phase">
+          <p:cNvPr id="22" name="chart_strategy">
             <a:extLst>
               <a:ext uri="{FF2B5EF4-FFF2-40B4-BE49-F238E27FC236}">
                 <a16:creationId xmlns:a16="http://schemas.microsoft.com/office/drawing/2014/main" id="{47E6EE2A-CF16-2F0E-4C46-1E0771EAF016}"/>
@@ -4474,7 +4474,7 @@
           <p:nvPr>
             <p:extLst>
               <p:ext uri="{D42A27DB-BD31-4B8C-83A1-F6EECF244321}">
-                <p14:modId xmlns:p14="http://schemas.microsoft.com/office/powerpoint/2010/main" val="888405179"/>
+                <p14:modId xmlns:p14="http://schemas.microsoft.com/office/powerpoint/2010/main" val="3791044565"/>
               </p:ext>
             </p:extLst>
           </p:nvPr>

--- a/template.pptx.pptx
+++ b/template.pptx.pptx
@@ -5870,19 +5870,9 @@
                 <a:ea typeface="KoPub돋움체 Bold" panose="02020603020101020101" pitchFamily="18" charset="-127"/>
                 <a:cs typeface="Arial" panose="020B0604020202020204" pitchFamily="34" charset="0"/>
               </a:rPr>
-              <a:t> _</a:t>
+              <a:t> _ {{NAME}}</a:t>
             </a:r>
-            <a:endParaRPr lang="ko-KR" altLang="en-US" b="1" dirty="0">
-              <a:solidFill>
-                <a:schemeClr val="tx1">
-                  <a:lumMod val="65000"/>
-                  <a:lumOff val="35000"/>
-                </a:schemeClr>
-              </a:solidFill>
-              <a:latin typeface="Arial" panose="020B0604020202020204" pitchFamily="34" charset="0"/>
-              <a:ea typeface="KoPub돋움체 Bold" panose="02020603020101020101" pitchFamily="18" charset="-127"/>
-              <a:cs typeface="Arial" panose="020B0604020202020204" pitchFamily="34" charset="0"/>
-            </a:endParaRPr>
+            <a:endParaRPr lang="ko-KR" altLang="en-US" dirty="0"/>
           </a:p>
         </p:txBody>
       </p:sp>
@@ -6888,966 +6878,6 @@
           </a:extLst>
         </p:spPr>
       </p:pic>
-      <p:sp>
-        <p:nvSpPr>
-          <p:cNvPr id="6" name="text_NAME">
-            <a:extLst>
-              <a:ext uri="{FF2B5EF4-FFF2-40B4-BE49-F238E27FC236}">
-                <a16:creationId xmlns:a16="http://schemas.microsoft.com/office/drawing/2014/main" id="{E82D058E-0ADC-B70F-0284-8516039C3CA1}"/>
-              </a:ext>
-            </a:extLst>
-          </p:cNvPr>
-          <p:cNvSpPr txBox="1"/>
-          <p:nvPr/>
-        </p:nvSpPr>
-        <p:spPr>
-          <a:xfrm>
-            <a:off x="7189764" y="510306"/>
-            <a:ext cx="1134104" cy="369332"/>
-          </a:xfrm>
-          <a:prstGeom prst="rect">
-            <a:avLst/>
-          </a:prstGeom>
-          <a:noFill/>
-        </p:spPr>
-        <p:txBody>
-          <a:bodyPr wrap="square">
-            <a:spAutoFit/>
-          </a:bodyPr>
-          <a:lstStyle/>
-          <a:p>
-            <a:r>
-              <a:rPr lang="en-US" altLang="ko-KR" b="1" dirty="0">
-                <a:solidFill>
-                  <a:schemeClr val="tx1">
-                    <a:lumMod val="65000"/>
-                    <a:lumOff val="35000"/>
-                  </a:schemeClr>
-                </a:solidFill>
-                <a:latin typeface="Arial" panose="020B0604020202020204" pitchFamily="34" charset="0"/>
-                <a:ea typeface="KoPub돋움체 Bold" panose="02020603020101020101" pitchFamily="18" charset="-127"/>
-                <a:cs typeface="Arial" panose="020B0604020202020204" pitchFamily="34" charset="0"/>
-              </a:rPr>
-              <a:t>{{NAME}}</a:t>
-            </a:r>
-            <a:endParaRPr lang="ko-KR" altLang="en-US" dirty="0"/>
-          </a:p>
-        </p:txBody>
-      </p:sp>
-      <p:graphicFrame>
-        <p:nvGraphicFramePr>
-          <p:cNvPr id="8" name="table_phase">
-            <a:extLst>
-              <a:ext uri="{FF2B5EF4-FFF2-40B4-BE49-F238E27FC236}">
-                <a16:creationId xmlns:a16="http://schemas.microsoft.com/office/drawing/2014/main" id="{768C5888-6553-397F-B3D3-2381CFC9209C}"/>
-              </a:ext>
-            </a:extLst>
-          </p:cNvPr>
-          <p:cNvGraphicFramePr>
-            <a:graphicFrameLocks noGrp="1"/>
-          </p:cNvGraphicFramePr>
-          <p:nvPr>
-            <p:extLst>
-              <p:ext uri="{D42A27DB-BD31-4B8C-83A1-F6EECF244321}">
-                <p14:modId xmlns:p14="http://schemas.microsoft.com/office/powerpoint/2010/main" val="1531583627"/>
-              </p:ext>
-            </p:extLst>
-          </p:nvPr>
-        </p:nvGraphicFramePr>
-        <p:xfrm>
-          <a:off x="-2057475" y="1108128"/>
-          <a:ext cx="1982269" cy="1126811"/>
-        </p:xfrm>
-        <a:graphic>
-          <a:graphicData uri="http://schemas.openxmlformats.org/drawingml/2006/table">
-            <a:tbl>
-              <a:tblPr>
-                <a:tableStyleId>{5C22544A-7EE6-4342-B048-85BDC9FD1C3A}</a:tableStyleId>
-              </a:tblPr>
-              <a:tblGrid>
-                <a:gridCol w="1168363">
-                  <a:extLst>
-                    <a:ext uri="{9D8B030D-6E8A-4147-A177-3AD203B41FA5}">
-                      <a16:colId xmlns:a16="http://schemas.microsoft.com/office/drawing/2014/main" val="279838531"/>
-                    </a:ext>
-                  </a:extLst>
-                </a:gridCol>
-                <a:gridCol w="813906">
-                  <a:extLst>
-                    <a:ext uri="{9D8B030D-6E8A-4147-A177-3AD203B41FA5}">
-                      <a16:colId xmlns:a16="http://schemas.microsoft.com/office/drawing/2014/main" val="2355549984"/>
-                    </a:ext>
-                  </a:extLst>
-                </a:gridCol>
-              </a:tblGrid>
-              <a:tr h="160973">
-                <a:tc>
-                  <a:txBody>
-                    <a:bodyPr/>
-                    <a:lstStyle/>
-                    <a:p>
-                      <a:pPr algn="l" fontAlgn="b">
-                        <a:buNone/>
-                      </a:pPr>
-                      <a:r>
-                        <a:rPr lang="ko-KR" altLang="en-US" sz="900" b="0" i="0" u="none" strike="noStrike" dirty="0">
-                          <a:solidFill>
-                            <a:srgbClr val="000000"/>
-                          </a:solidFill>
-                          <a:effectLst/>
-                          <a:latin typeface="Pretendard" panose="02000503000000020004" pitchFamily="2" charset="-127"/>
-                          <a:ea typeface="Pretendard" panose="02000503000000020004" pitchFamily="2" charset="-127"/>
-                          <a:cs typeface="Pretendard" panose="02000503000000020004" pitchFamily="2" charset="-127"/>
-                        </a:rPr>
-                        <a:t>항목명</a:t>
-                      </a:r>
-                    </a:p>
-                  </a:txBody>
-                  <a:tcPr marL="6191" marR="6191" marT="6191" marB="0" anchor="b">
-                    <a:solidFill>
-                      <a:schemeClr val="accent6"/>
-                    </a:solidFill>
-                  </a:tcPr>
-                </a:tc>
-                <a:tc>
-                  <a:txBody>
-                    <a:bodyPr/>
-                    <a:lstStyle/>
-                    <a:p>
-                      <a:pPr algn="l" fontAlgn="b">
-                        <a:buNone/>
-                      </a:pPr>
-                      <a:r>
-                        <a:rPr lang="ko-KR" altLang="en-US" sz="900" b="0" i="0" u="none" strike="noStrike" dirty="0">
-                          <a:solidFill>
-                            <a:srgbClr val="000000"/>
-                          </a:solidFill>
-                          <a:effectLst/>
-                          <a:latin typeface="Pretendard" panose="02000503000000020004" pitchFamily="2" charset="-127"/>
-                          <a:ea typeface="Pretendard" panose="02000503000000020004" pitchFamily="2" charset="-127"/>
-                          <a:cs typeface="Pretendard" panose="02000503000000020004" pitchFamily="2" charset="-127"/>
-                        </a:rPr>
-                        <a:t>평균점수</a:t>
-                      </a:r>
-                    </a:p>
-                  </a:txBody>
-                  <a:tcPr marL="6191" marR="6191" marT="6191" marB="0" anchor="b">
-                    <a:solidFill>
-                      <a:schemeClr val="accent6"/>
-                    </a:solidFill>
-                  </a:tcPr>
-                </a:tc>
-                <a:extLst>
-                  <a:ext uri="{0D108BD9-81ED-4DB2-BD59-A6C34878D82A}">
-                    <a16:rowId xmlns:a16="http://schemas.microsoft.com/office/drawing/2014/main" val="205790897"/>
-                  </a:ext>
-                </a:extLst>
-              </a:tr>
-              <a:tr h="160973">
-                <a:tc>
-                  <a:txBody>
-                    <a:bodyPr/>
-                    <a:lstStyle/>
-                    <a:p>
-                      <a:endParaRPr sz="900" dirty="0">
-                        <a:latin typeface="Pretendard" panose="02000503000000020004" pitchFamily="2" charset="-127"/>
-                        <a:ea typeface="Pretendard" panose="02000503000000020004" pitchFamily="2" charset="-127"/>
-                        <a:cs typeface="Pretendard" panose="02000503000000020004" pitchFamily="2" charset="-127"/>
-                      </a:endParaRPr>
-                    </a:p>
-                  </a:txBody>
-                  <a:tcPr marL="6191" marR="6191" marT="6191" marB="0" anchor="b">
-                    <a:solidFill>
-                      <a:schemeClr val="accent6"/>
-                    </a:solidFill>
-                  </a:tcPr>
-                </a:tc>
-                <a:tc>
-                  <a:txBody>
-                    <a:bodyPr/>
-                    <a:lstStyle/>
-                    <a:p>
-                      <a:endParaRPr sz="900">
-                        <a:latin typeface="Pretendard" panose="02000503000000020004" pitchFamily="2" charset="-127"/>
-                        <a:ea typeface="Pretendard" panose="02000503000000020004" pitchFamily="2" charset="-127"/>
-                        <a:cs typeface="Pretendard" panose="02000503000000020004" pitchFamily="2" charset="-127"/>
-                      </a:endParaRPr>
-                    </a:p>
-                  </a:txBody>
-                  <a:tcPr marL="6191" marR="6191" marT="6191" marB="0" anchor="b">
-                    <a:solidFill>
-                      <a:schemeClr val="accent6"/>
-                    </a:solidFill>
-                  </a:tcPr>
-                </a:tc>
-                <a:extLst>
-                  <a:ext uri="{0D108BD9-81ED-4DB2-BD59-A6C34878D82A}">
-                    <a16:rowId xmlns:a16="http://schemas.microsoft.com/office/drawing/2014/main" val="1753715540"/>
-                  </a:ext>
-                </a:extLst>
-              </a:tr>
-              <a:tr h="160973">
-                <a:tc>
-                  <a:txBody>
-                    <a:bodyPr/>
-                    <a:lstStyle/>
-                    <a:p>
-                      <a:endParaRPr sz="900" dirty="0">
-                        <a:latin typeface="Pretendard" panose="02000503000000020004" pitchFamily="2" charset="-127"/>
-                        <a:ea typeface="Pretendard" panose="02000503000000020004" pitchFamily="2" charset="-127"/>
-                        <a:cs typeface="Pretendard" panose="02000503000000020004" pitchFamily="2" charset="-127"/>
-                      </a:endParaRPr>
-                    </a:p>
-                  </a:txBody>
-                  <a:tcPr marL="6191" marR="6191" marT="6191" marB="0" anchor="b">
-                    <a:solidFill>
-                      <a:schemeClr val="accent6"/>
-                    </a:solidFill>
-                  </a:tcPr>
-                </a:tc>
-                <a:tc>
-                  <a:txBody>
-                    <a:bodyPr/>
-                    <a:lstStyle/>
-                    <a:p>
-                      <a:endParaRPr sz="900" dirty="0">
-                        <a:latin typeface="Pretendard" panose="02000503000000020004" pitchFamily="2" charset="-127"/>
-                        <a:ea typeface="Pretendard" panose="02000503000000020004" pitchFamily="2" charset="-127"/>
-                        <a:cs typeface="Pretendard" panose="02000503000000020004" pitchFamily="2" charset="-127"/>
-                      </a:endParaRPr>
-                    </a:p>
-                  </a:txBody>
-                  <a:tcPr marL="6191" marR="6191" marT="6191" marB="0" anchor="b">
-                    <a:solidFill>
-                      <a:schemeClr val="accent6"/>
-                    </a:solidFill>
-                  </a:tcPr>
-                </a:tc>
-                <a:extLst>
-                  <a:ext uri="{0D108BD9-81ED-4DB2-BD59-A6C34878D82A}">
-                    <a16:rowId xmlns:a16="http://schemas.microsoft.com/office/drawing/2014/main" val="1982899589"/>
-                  </a:ext>
-                </a:extLst>
-              </a:tr>
-              <a:tr h="160973">
-                <a:tc>
-                  <a:txBody>
-                    <a:bodyPr/>
-                    <a:lstStyle/>
-                    <a:p>
-                      <a:endParaRPr sz="900">
-                        <a:latin typeface="Pretendard" panose="02000503000000020004" pitchFamily="2" charset="-127"/>
-                        <a:ea typeface="Pretendard" panose="02000503000000020004" pitchFamily="2" charset="-127"/>
-                        <a:cs typeface="Pretendard" panose="02000503000000020004" pitchFamily="2" charset="-127"/>
-                      </a:endParaRPr>
-                    </a:p>
-                  </a:txBody>
-                  <a:tcPr marL="6191" marR="6191" marT="6191" marB="0" anchor="b">
-                    <a:solidFill>
-                      <a:schemeClr val="accent6"/>
-                    </a:solidFill>
-                  </a:tcPr>
-                </a:tc>
-                <a:tc>
-                  <a:txBody>
-                    <a:bodyPr/>
-                    <a:lstStyle/>
-                    <a:p>
-                      <a:endParaRPr sz="900" dirty="0">
-                        <a:latin typeface="Pretendard" panose="02000503000000020004" pitchFamily="2" charset="-127"/>
-                        <a:ea typeface="Pretendard" panose="02000503000000020004" pitchFamily="2" charset="-127"/>
-                        <a:cs typeface="Pretendard" panose="02000503000000020004" pitchFamily="2" charset="-127"/>
-                      </a:endParaRPr>
-                    </a:p>
-                  </a:txBody>
-                  <a:tcPr marL="6191" marR="6191" marT="6191" marB="0" anchor="b">
-                    <a:solidFill>
-                      <a:schemeClr val="accent6"/>
-                    </a:solidFill>
-                  </a:tcPr>
-                </a:tc>
-                <a:extLst>
-                  <a:ext uri="{0D108BD9-81ED-4DB2-BD59-A6C34878D82A}">
-                    <a16:rowId xmlns:a16="http://schemas.microsoft.com/office/drawing/2014/main" val="3629806957"/>
-                  </a:ext>
-                </a:extLst>
-              </a:tr>
-              <a:tr h="160973">
-                <a:tc>
-                  <a:txBody>
-                    <a:bodyPr/>
-                    <a:lstStyle/>
-                    <a:p>
-                      <a:endParaRPr sz="900" dirty="0">
-                        <a:latin typeface="Pretendard" panose="02000503000000020004" pitchFamily="2" charset="-127"/>
-                        <a:ea typeface="Pretendard" panose="02000503000000020004" pitchFamily="2" charset="-127"/>
-                        <a:cs typeface="Pretendard" panose="02000503000000020004" pitchFamily="2" charset="-127"/>
-                      </a:endParaRPr>
-                    </a:p>
-                  </a:txBody>
-                  <a:tcPr marL="6191" marR="6191" marT="6191" marB="0" anchor="b">
-                    <a:solidFill>
-                      <a:schemeClr val="accent6"/>
-                    </a:solidFill>
-                  </a:tcPr>
-                </a:tc>
-                <a:tc>
-                  <a:txBody>
-                    <a:bodyPr/>
-                    <a:lstStyle/>
-                    <a:p>
-                      <a:endParaRPr sz="900" dirty="0">
-                        <a:latin typeface="Pretendard" panose="02000503000000020004" pitchFamily="2" charset="-127"/>
-                        <a:ea typeface="Pretendard" panose="02000503000000020004" pitchFamily="2" charset="-127"/>
-                        <a:cs typeface="Pretendard" panose="02000503000000020004" pitchFamily="2" charset="-127"/>
-                      </a:endParaRPr>
-                    </a:p>
-                  </a:txBody>
-                  <a:tcPr marL="6191" marR="6191" marT="6191" marB="0" anchor="b">
-                    <a:solidFill>
-                      <a:schemeClr val="accent6"/>
-                    </a:solidFill>
-                  </a:tcPr>
-                </a:tc>
-                <a:extLst>
-                  <a:ext uri="{0D108BD9-81ED-4DB2-BD59-A6C34878D82A}">
-                    <a16:rowId xmlns:a16="http://schemas.microsoft.com/office/drawing/2014/main" val="2543043573"/>
-                  </a:ext>
-                </a:extLst>
-              </a:tr>
-              <a:tr h="160973">
-                <a:tc>
-                  <a:txBody>
-                    <a:bodyPr/>
-                    <a:lstStyle/>
-                    <a:p>
-                      <a:endParaRPr sz="900" dirty="0">
-                        <a:latin typeface="Pretendard" panose="02000503000000020004" pitchFamily="2" charset="-127"/>
-                        <a:ea typeface="Pretendard" panose="02000503000000020004" pitchFamily="2" charset="-127"/>
-                        <a:cs typeface="Pretendard" panose="02000503000000020004" pitchFamily="2" charset="-127"/>
-                      </a:endParaRPr>
-                    </a:p>
-                  </a:txBody>
-                  <a:tcPr marL="6191" marR="6191" marT="6191" marB="0" anchor="b">
-                    <a:solidFill>
-                      <a:schemeClr val="accent6"/>
-                    </a:solidFill>
-                  </a:tcPr>
-                </a:tc>
-                <a:tc>
-                  <a:txBody>
-                    <a:bodyPr/>
-                    <a:lstStyle/>
-                    <a:p>
-                      <a:endParaRPr sz="900" dirty="0">
-                        <a:latin typeface="Pretendard" panose="02000503000000020004" pitchFamily="2" charset="-127"/>
-                        <a:ea typeface="Pretendard" panose="02000503000000020004" pitchFamily="2" charset="-127"/>
-                        <a:cs typeface="Pretendard" panose="02000503000000020004" pitchFamily="2" charset="-127"/>
-                      </a:endParaRPr>
-                    </a:p>
-                  </a:txBody>
-                  <a:tcPr marL="6191" marR="6191" marT="6191" marB="0" anchor="b">
-                    <a:solidFill>
-                      <a:schemeClr val="accent6"/>
-                    </a:solidFill>
-                  </a:tcPr>
-                </a:tc>
-                <a:extLst>
-                  <a:ext uri="{0D108BD9-81ED-4DB2-BD59-A6C34878D82A}">
-                    <a16:rowId xmlns:a16="http://schemas.microsoft.com/office/drawing/2014/main" val="3007960184"/>
-                  </a:ext>
-                </a:extLst>
-              </a:tr>
-              <a:tr h="160973">
-                <a:tc>
-                  <a:txBody>
-                    <a:bodyPr/>
-                    <a:lstStyle/>
-                    <a:p>
-                      <a:endParaRPr sz="900">
-                        <a:latin typeface="Pretendard" panose="02000503000000020004" pitchFamily="2" charset="-127"/>
-                        <a:ea typeface="Pretendard" panose="02000503000000020004" pitchFamily="2" charset="-127"/>
-                        <a:cs typeface="Pretendard" panose="02000503000000020004" pitchFamily="2" charset="-127"/>
-                      </a:endParaRPr>
-                    </a:p>
-                  </a:txBody>
-                  <a:tcPr marL="6191" marR="6191" marT="6191" marB="0" anchor="b">
-                    <a:solidFill>
-                      <a:schemeClr val="accent6"/>
-                    </a:solidFill>
-                  </a:tcPr>
-                </a:tc>
-                <a:tc>
-                  <a:txBody>
-                    <a:bodyPr/>
-                    <a:lstStyle/>
-                    <a:p>
-                      <a:endParaRPr sz="900" dirty="0">
-                        <a:latin typeface="Pretendard" panose="02000503000000020004" pitchFamily="2" charset="-127"/>
-                        <a:ea typeface="Pretendard" panose="02000503000000020004" pitchFamily="2" charset="-127"/>
-                        <a:cs typeface="Pretendard" panose="02000503000000020004" pitchFamily="2" charset="-127"/>
-                      </a:endParaRPr>
-                    </a:p>
-                  </a:txBody>
-                  <a:tcPr marL="6191" marR="6191" marT="6191" marB="0" anchor="b">
-                    <a:solidFill>
-                      <a:schemeClr val="accent6"/>
-                    </a:solidFill>
-                  </a:tcPr>
-                </a:tc>
-                <a:extLst>
-                  <a:ext uri="{0D108BD9-81ED-4DB2-BD59-A6C34878D82A}">
-                    <a16:rowId xmlns:a16="http://schemas.microsoft.com/office/drawing/2014/main" val="871243760"/>
-                  </a:ext>
-                </a:extLst>
-              </a:tr>
-            </a:tbl>
-          </a:graphicData>
-        </a:graphic>
-      </p:graphicFrame>
-      <p:graphicFrame>
-        <p:nvGraphicFramePr>
-          <p:cNvPr id="9" name="table_strategy">
-            <a:extLst>
-              <a:ext uri="{FF2B5EF4-FFF2-40B4-BE49-F238E27FC236}">
-                <a16:creationId xmlns:a16="http://schemas.microsoft.com/office/drawing/2014/main" id="{F634C145-28E2-D88B-A178-E8D1F6E1B180}"/>
-              </a:ext>
-            </a:extLst>
-          </p:cNvPr>
-          <p:cNvGraphicFramePr>
-            <a:graphicFrameLocks noGrp="1"/>
-          </p:cNvGraphicFramePr>
-          <p:nvPr>
-            <p:extLst>
-              <p:ext uri="{D42A27DB-BD31-4B8C-83A1-F6EECF244321}">
-                <p14:modId xmlns:p14="http://schemas.microsoft.com/office/powerpoint/2010/main" val="3066933571"/>
-              </p:ext>
-            </p:extLst>
-          </p:nvPr>
-        </p:nvGraphicFramePr>
-        <p:xfrm>
-          <a:off x="-2057476" y="4665754"/>
-          <a:ext cx="1982269" cy="1770703"/>
-        </p:xfrm>
-        <a:graphic>
-          <a:graphicData uri="http://schemas.openxmlformats.org/drawingml/2006/table">
-            <a:tbl>
-              <a:tblPr>
-                <a:tableStyleId>{5C22544A-7EE6-4342-B048-85BDC9FD1C3A}</a:tableStyleId>
-              </a:tblPr>
-              <a:tblGrid>
-                <a:gridCol w="1168363">
-                  <a:extLst>
-                    <a:ext uri="{9D8B030D-6E8A-4147-A177-3AD203B41FA5}">
-                      <a16:colId xmlns:a16="http://schemas.microsoft.com/office/drawing/2014/main" val="279838531"/>
-                    </a:ext>
-                  </a:extLst>
-                </a:gridCol>
-                <a:gridCol w="813906">
-                  <a:extLst>
-                    <a:ext uri="{9D8B030D-6E8A-4147-A177-3AD203B41FA5}">
-                      <a16:colId xmlns:a16="http://schemas.microsoft.com/office/drawing/2014/main" val="2355549984"/>
-                    </a:ext>
-                  </a:extLst>
-                </a:gridCol>
-              </a:tblGrid>
-              <a:tr h="160973">
-                <a:tc>
-                  <a:txBody>
-                    <a:bodyPr/>
-                    <a:lstStyle/>
-                    <a:p>
-                      <a:pPr algn="l" fontAlgn="b">
-                        <a:buNone/>
-                      </a:pPr>
-                      <a:r>
-                        <a:rPr lang="ko-KR" altLang="en-US" sz="900" b="0" i="0" u="none" strike="noStrike" dirty="0">
-                          <a:solidFill>
-                            <a:srgbClr val="000000"/>
-                          </a:solidFill>
-                          <a:effectLst/>
-                          <a:latin typeface="Pretendard" panose="02000503000000020004" pitchFamily="2" charset="-127"/>
-                          <a:ea typeface="Pretendard" panose="02000503000000020004" pitchFamily="2" charset="-127"/>
-                          <a:cs typeface="Pretendard" panose="02000503000000020004" pitchFamily="2" charset="-127"/>
-                        </a:rPr>
-                        <a:t>항목명</a:t>
-                      </a:r>
-                    </a:p>
-                  </a:txBody>
-                  <a:tcPr marL="6191" marR="6191" marT="6191" marB="0" anchor="b">
-                    <a:solidFill>
-                      <a:schemeClr val="accent6"/>
-                    </a:solidFill>
-                  </a:tcPr>
-                </a:tc>
-                <a:tc>
-                  <a:txBody>
-                    <a:bodyPr/>
-                    <a:lstStyle/>
-                    <a:p>
-                      <a:pPr algn="l" fontAlgn="b">
-                        <a:buNone/>
-                      </a:pPr>
-                      <a:r>
-                        <a:rPr lang="ko-KR" altLang="en-US" sz="900" b="0" i="0" u="none" strike="noStrike" dirty="0">
-                          <a:solidFill>
-                            <a:srgbClr val="000000"/>
-                          </a:solidFill>
-                          <a:effectLst/>
-                          <a:latin typeface="Pretendard" panose="02000503000000020004" pitchFamily="2" charset="-127"/>
-                          <a:ea typeface="Pretendard" panose="02000503000000020004" pitchFamily="2" charset="-127"/>
-                          <a:cs typeface="Pretendard" panose="02000503000000020004" pitchFamily="2" charset="-127"/>
-                        </a:rPr>
-                        <a:t>평균점수</a:t>
-                      </a:r>
-                    </a:p>
-                  </a:txBody>
-                  <a:tcPr marL="6191" marR="6191" marT="6191" marB="0" anchor="b">
-                    <a:solidFill>
-                      <a:schemeClr val="accent6"/>
-                    </a:solidFill>
-                  </a:tcPr>
-                </a:tc>
-                <a:extLst>
-                  <a:ext uri="{0D108BD9-81ED-4DB2-BD59-A6C34878D82A}">
-                    <a16:rowId xmlns:a16="http://schemas.microsoft.com/office/drawing/2014/main" val="205790897"/>
-                  </a:ext>
-                </a:extLst>
-              </a:tr>
-              <a:tr h="160973">
-                <a:tc>
-                  <a:txBody>
-                    <a:bodyPr/>
-                    <a:lstStyle/>
-                    <a:p>
-                      <a:endParaRPr sz="900" dirty="0">
-                        <a:latin typeface="Pretendard" panose="02000503000000020004" pitchFamily="2" charset="-127"/>
-                        <a:ea typeface="Pretendard" panose="02000503000000020004" pitchFamily="2" charset="-127"/>
-                        <a:cs typeface="Pretendard" panose="02000503000000020004" pitchFamily="2" charset="-127"/>
-                      </a:endParaRPr>
-                    </a:p>
-                  </a:txBody>
-                  <a:tcPr marL="6191" marR="6191" marT="6191" marB="0" anchor="b">
-                    <a:solidFill>
-                      <a:schemeClr val="accent6"/>
-                    </a:solidFill>
-                  </a:tcPr>
-                </a:tc>
-                <a:tc>
-                  <a:txBody>
-                    <a:bodyPr/>
-                    <a:lstStyle/>
-                    <a:p>
-                      <a:endParaRPr sz="900">
-                        <a:latin typeface="Pretendard" panose="02000503000000020004" pitchFamily="2" charset="-127"/>
-                        <a:ea typeface="Pretendard" panose="02000503000000020004" pitchFamily="2" charset="-127"/>
-                        <a:cs typeface="Pretendard" panose="02000503000000020004" pitchFamily="2" charset="-127"/>
-                      </a:endParaRPr>
-                    </a:p>
-                  </a:txBody>
-                  <a:tcPr marL="6191" marR="6191" marT="6191" marB="0" anchor="b">
-                    <a:solidFill>
-                      <a:schemeClr val="accent6"/>
-                    </a:solidFill>
-                  </a:tcPr>
-                </a:tc>
-                <a:extLst>
-                  <a:ext uri="{0D108BD9-81ED-4DB2-BD59-A6C34878D82A}">
-                    <a16:rowId xmlns:a16="http://schemas.microsoft.com/office/drawing/2014/main" val="1753715540"/>
-                  </a:ext>
-                </a:extLst>
-              </a:tr>
-              <a:tr h="160973">
-                <a:tc>
-                  <a:txBody>
-                    <a:bodyPr/>
-                    <a:lstStyle/>
-                    <a:p>
-                      <a:endParaRPr sz="900" dirty="0">
-                        <a:latin typeface="Pretendard" panose="02000503000000020004" pitchFamily="2" charset="-127"/>
-                        <a:ea typeface="Pretendard" panose="02000503000000020004" pitchFamily="2" charset="-127"/>
-                        <a:cs typeface="Pretendard" panose="02000503000000020004" pitchFamily="2" charset="-127"/>
-                      </a:endParaRPr>
-                    </a:p>
-                  </a:txBody>
-                  <a:tcPr marL="6191" marR="6191" marT="6191" marB="0" anchor="b">
-                    <a:solidFill>
-                      <a:schemeClr val="accent6"/>
-                    </a:solidFill>
-                  </a:tcPr>
-                </a:tc>
-                <a:tc>
-                  <a:txBody>
-                    <a:bodyPr/>
-                    <a:lstStyle/>
-                    <a:p>
-                      <a:endParaRPr sz="900" dirty="0">
-                        <a:latin typeface="Pretendard" panose="02000503000000020004" pitchFamily="2" charset="-127"/>
-                        <a:ea typeface="Pretendard" panose="02000503000000020004" pitchFamily="2" charset="-127"/>
-                        <a:cs typeface="Pretendard" panose="02000503000000020004" pitchFamily="2" charset="-127"/>
-                      </a:endParaRPr>
-                    </a:p>
-                  </a:txBody>
-                  <a:tcPr marL="6191" marR="6191" marT="6191" marB="0" anchor="b">
-                    <a:solidFill>
-                      <a:schemeClr val="accent6"/>
-                    </a:solidFill>
-                  </a:tcPr>
-                </a:tc>
-                <a:extLst>
-                  <a:ext uri="{0D108BD9-81ED-4DB2-BD59-A6C34878D82A}">
-                    <a16:rowId xmlns:a16="http://schemas.microsoft.com/office/drawing/2014/main" val="1982899589"/>
-                  </a:ext>
-                </a:extLst>
-              </a:tr>
-              <a:tr h="160973">
-                <a:tc>
-                  <a:txBody>
-                    <a:bodyPr/>
-                    <a:lstStyle/>
-                    <a:p>
-                      <a:endParaRPr sz="900">
-                        <a:latin typeface="Pretendard" panose="02000503000000020004" pitchFamily="2" charset="-127"/>
-                        <a:ea typeface="Pretendard" panose="02000503000000020004" pitchFamily="2" charset="-127"/>
-                        <a:cs typeface="Pretendard" panose="02000503000000020004" pitchFamily="2" charset="-127"/>
-                      </a:endParaRPr>
-                    </a:p>
-                  </a:txBody>
-                  <a:tcPr marL="6191" marR="6191" marT="6191" marB="0" anchor="b">
-                    <a:solidFill>
-                      <a:schemeClr val="accent6"/>
-                    </a:solidFill>
-                  </a:tcPr>
-                </a:tc>
-                <a:tc>
-                  <a:txBody>
-                    <a:bodyPr/>
-                    <a:lstStyle/>
-                    <a:p>
-                      <a:endParaRPr sz="900" dirty="0">
-                        <a:latin typeface="Pretendard" panose="02000503000000020004" pitchFamily="2" charset="-127"/>
-                        <a:ea typeface="Pretendard" panose="02000503000000020004" pitchFamily="2" charset="-127"/>
-                        <a:cs typeface="Pretendard" panose="02000503000000020004" pitchFamily="2" charset="-127"/>
-                      </a:endParaRPr>
-                    </a:p>
-                  </a:txBody>
-                  <a:tcPr marL="6191" marR="6191" marT="6191" marB="0" anchor="b">
-                    <a:solidFill>
-                      <a:schemeClr val="accent6"/>
-                    </a:solidFill>
-                  </a:tcPr>
-                </a:tc>
-                <a:extLst>
-                  <a:ext uri="{0D108BD9-81ED-4DB2-BD59-A6C34878D82A}">
-                    <a16:rowId xmlns:a16="http://schemas.microsoft.com/office/drawing/2014/main" val="3629806957"/>
-                  </a:ext>
-                </a:extLst>
-              </a:tr>
-              <a:tr h="160973">
-                <a:tc>
-                  <a:txBody>
-                    <a:bodyPr/>
-                    <a:lstStyle/>
-                    <a:p>
-                      <a:endParaRPr sz="900" dirty="0">
-                        <a:latin typeface="Pretendard" panose="02000503000000020004" pitchFamily="2" charset="-127"/>
-                        <a:ea typeface="Pretendard" panose="02000503000000020004" pitchFamily="2" charset="-127"/>
-                        <a:cs typeface="Pretendard" panose="02000503000000020004" pitchFamily="2" charset="-127"/>
-                      </a:endParaRPr>
-                    </a:p>
-                  </a:txBody>
-                  <a:tcPr marL="6191" marR="6191" marT="6191" marB="0" anchor="b">
-                    <a:solidFill>
-                      <a:schemeClr val="accent6"/>
-                    </a:solidFill>
-                  </a:tcPr>
-                </a:tc>
-                <a:tc>
-                  <a:txBody>
-                    <a:bodyPr/>
-                    <a:lstStyle/>
-                    <a:p>
-                      <a:endParaRPr sz="900" dirty="0">
-                        <a:latin typeface="Pretendard" panose="02000503000000020004" pitchFamily="2" charset="-127"/>
-                        <a:ea typeface="Pretendard" panose="02000503000000020004" pitchFamily="2" charset="-127"/>
-                        <a:cs typeface="Pretendard" panose="02000503000000020004" pitchFamily="2" charset="-127"/>
-                      </a:endParaRPr>
-                    </a:p>
-                  </a:txBody>
-                  <a:tcPr marL="6191" marR="6191" marT="6191" marB="0" anchor="b">
-                    <a:solidFill>
-                      <a:schemeClr val="accent6"/>
-                    </a:solidFill>
-                  </a:tcPr>
-                </a:tc>
-                <a:extLst>
-                  <a:ext uri="{0D108BD9-81ED-4DB2-BD59-A6C34878D82A}">
-                    <a16:rowId xmlns:a16="http://schemas.microsoft.com/office/drawing/2014/main" val="2543043573"/>
-                  </a:ext>
-                </a:extLst>
-              </a:tr>
-              <a:tr h="160973">
-                <a:tc>
-                  <a:txBody>
-                    <a:bodyPr/>
-                    <a:lstStyle/>
-                    <a:p>
-                      <a:endParaRPr sz="900" dirty="0">
-                        <a:latin typeface="Pretendard" panose="02000503000000020004" pitchFamily="2" charset="-127"/>
-                        <a:ea typeface="Pretendard" panose="02000503000000020004" pitchFamily="2" charset="-127"/>
-                        <a:cs typeface="Pretendard" panose="02000503000000020004" pitchFamily="2" charset="-127"/>
-                      </a:endParaRPr>
-                    </a:p>
-                  </a:txBody>
-                  <a:tcPr marL="6191" marR="6191" marT="6191" marB="0" anchor="b">
-                    <a:solidFill>
-                      <a:schemeClr val="accent6"/>
-                    </a:solidFill>
-                  </a:tcPr>
-                </a:tc>
-                <a:tc>
-                  <a:txBody>
-                    <a:bodyPr/>
-                    <a:lstStyle/>
-                    <a:p>
-                      <a:endParaRPr sz="900" dirty="0">
-                        <a:latin typeface="Pretendard" panose="02000503000000020004" pitchFamily="2" charset="-127"/>
-                        <a:ea typeface="Pretendard" panose="02000503000000020004" pitchFamily="2" charset="-127"/>
-                        <a:cs typeface="Pretendard" panose="02000503000000020004" pitchFamily="2" charset="-127"/>
-                      </a:endParaRPr>
-                    </a:p>
-                  </a:txBody>
-                  <a:tcPr marL="6191" marR="6191" marT="6191" marB="0" anchor="b">
-                    <a:solidFill>
-                      <a:schemeClr val="accent6"/>
-                    </a:solidFill>
-                  </a:tcPr>
-                </a:tc>
-                <a:extLst>
-                  <a:ext uri="{0D108BD9-81ED-4DB2-BD59-A6C34878D82A}">
-                    <a16:rowId xmlns:a16="http://schemas.microsoft.com/office/drawing/2014/main" val="3007960184"/>
-                  </a:ext>
-                </a:extLst>
-              </a:tr>
-              <a:tr h="160973">
-                <a:tc>
-                  <a:txBody>
-                    <a:bodyPr/>
-                    <a:lstStyle/>
-                    <a:p>
-                      <a:endParaRPr sz="900" dirty="0">
-                        <a:latin typeface="Pretendard" panose="02000503000000020004" pitchFamily="2" charset="-127"/>
-                        <a:ea typeface="Pretendard" panose="02000503000000020004" pitchFamily="2" charset="-127"/>
-                        <a:cs typeface="Pretendard" panose="02000503000000020004" pitchFamily="2" charset="-127"/>
-                      </a:endParaRPr>
-                    </a:p>
-                  </a:txBody>
-                  <a:tcPr marL="6191" marR="6191" marT="6191" marB="0" anchor="b">
-                    <a:solidFill>
-                      <a:schemeClr val="accent6"/>
-                    </a:solidFill>
-                  </a:tcPr>
-                </a:tc>
-                <a:tc>
-                  <a:txBody>
-                    <a:bodyPr/>
-                    <a:lstStyle/>
-                    <a:p>
-                      <a:endParaRPr sz="900" dirty="0">
-                        <a:latin typeface="Pretendard" panose="02000503000000020004" pitchFamily="2" charset="-127"/>
-                        <a:ea typeface="Pretendard" panose="02000503000000020004" pitchFamily="2" charset="-127"/>
-                        <a:cs typeface="Pretendard" panose="02000503000000020004" pitchFamily="2" charset="-127"/>
-                      </a:endParaRPr>
-                    </a:p>
-                  </a:txBody>
-                  <a:tcPr marL="6191" marR="6191" marT="6191" marB="0" anchor="b">
-                    <a:solidFill>
-                      <a:schemeClr val="accent6"/>
-                    </a:solidFill>
-                  </a:tcPr>
-                </a:tc>
-                <a:extLst>
-                  <a:ext uri="{0D108BD9-81ED-4DB2-BD59-A6C34878D82A}">
-                    <a16:rowId xmlns:a16="http://schemas.microsoft.com/office/drawing/2014/main" val="1074187918"/>
-                  </a:ext>
-                </a:extLst>
-              </a:tr>
-              <a:tr h="160973">
-                <a:tc>
-                  <a:txBody>
-                    <a:bodyPr/>
-                    <a:lstStyle/>
-                    <a:p>
-                      <a:endParaRPr sz="900" dirty="0">
-                        <a:latin typeface="Pretendard" panose="02000503000000020004" pitchFamily="2" charset="-127"/>
-                        <a:ea typeface="Pretendard" panose="02000503000000020004" pitchFamily="2" charset="-127"/>
-                        <a:cs typeface="Pretendard" panose="02000503000000020004" pitchFamily="2" charset="-127"/>
-                      </a:endParaRPr>
-                    </a:p>
-                  </a:txBody>
-                  <a:tcPr marL="6191" marR="6191" marT="6191" marB="0" anchor="b">
-                    <a:solidFill>
-                      <a:schemeClr val="accent6"/>
-                    </a:solidFill>
-                  </a:tcPr>
-                </a:tc>
-                <a:tc>
-                  <a:txBody>
-                    <a:bodyPr/>
-                    <a:lstStyle/>
-                    <a:p>
-                      <a:endParaRPr sz="900" dirty="0">
-                        <a:latin typeface="Pretendard" panose="02000503000000020004" pitchFamily="2" charset="-127"/>
-                        <a:ea typeface="Pretendard" panose="02000503000000020004" pitchFamily="2" charset="-127"/>
-                        <a:cs typeface="Pretendard" panose="02000503000000020004" pitchFamily="2" charset="-127"/>
-                      </a:endParaRPr>
-                    </a:p>
-                  </a:txBody>
-                  <a:tcPr marL="6191" marR="6191" marT="6191" marB="0" anchor="b">
-                    <a:solidFill>
-                      <a:schemeClr val="accent6"/>
-                    </a:solidFill>
-                  </a:tcPr>
-                </a:tc>
-                <a:extLst>
-                  <a:ext uri="{0D108BD9-81ED-4DB2-BD59-A6C34878D82A}">
-                    <a16:rowId xmlns:a16="http://schemas.microsoft.com/office/drawing/2014/main" val="926797788"/>
-                  </a:ext>
-                </a:extLst>
-              </a:tr>
-              <a:tr h="160973">
-                <a:tc>
-                  <a:txBody>
-                    <a:bodyPr/>
-                    <a:lstStyle/>
-                    <a:p>
-                      <a:endParaRPr sz="900" dirty="0">
-                        <a:latin typeface="Pretendard" panose="02000503000000020004" pitchFamily="2" charset="-127"/>
-                        <a:ea typeface="Pretendard" panose="02000503000000020004" pitchFamily="2" charset="-127"/>
-                        <a:cs typeface="Pretendard" panose="02000503000000020004" pitchFamily="2" charset="-127"/>
-                      </a:endParaRPr>
-                    </a:p>
-                  </a:txBody>
-                  <a:tcPr marL="6191" marR="6191" marT="6191" marB="0" anchor="b">
-                    <a:solidFill>
-                      <a:schemeClr val="accent6"/>
-                    </a:solidFill>
-                  </a:tcPr>
-                </a:tc>
-                <a:tc>
-                  <a:txBody>
-                    <a:bodyPr/>
-                    <a:lstStyle/>
-                    <a:p>
-                      <a:endParaRPr sz="900" dirty="0">
-                        <a:latin typeface="Pretendard" panose="02000503000000020004" pitchFamily="2" charset="-127"/>
-                        <a:ea typeface="Pretendard" panose="02000503000000020004" pitchFamily="2" charset="-127"/>
-                        <a:cs typeface="Pretendard" panose="02000503000000020004" pitchFamily="2" charset="-127"/>
-                      </a:endParaRPr>
-                    </a:p>
-                  </a:txBody>
-                  <a:tcPr marL="6191" marR="6191" marT="6191" marB="0" anchor="b">
-                    <a:solidFill>
-                      <a:schemeClr val="accent6"/>
-                    </a:solidFill>
-                  </a:tcPr>
-                </a:tc>
-                <a:extLst>
-                  <a:ext uri="{0D108BD9-81ED-4DB2-BD59-A6C34878D82A}">
-                    <a16:rowId xmlns:a16="http://schemas.microsoft.com/office/drawing/2014/main" val="1930534886"/>
-                  </a:ext>
-                </a:extLst>
-              </a:tr>
-              <a:tr h="160973">
-                <a:tc>
-                  <a:txBody>
-                    <a:bodyPr/>
-                    <a:lstStyle/>
-                    <a:p>
-                      <a:endParaRPr sz="900" dirty="0">
-                        <a:latin typeface="Pretendard" panose="02000503000000020004" pitchFamily="2" charset="-127"/>
-                        <a:ea typeface="Pretendard" panose="02000503000000020004" pitchFamily="2" charset="-127"/>
-                        <a:cs typeface="Pretendard" panose="02000503000000020004" pitchFamily="2" charset="-127"/>
-                      </a:endParaRPr>
-                    </a:p>
-                  </a:txBody>
-                  <a:tcPr marL="6191" marR="6191" marT="6191" marB="0" anchor="b">
-                    <a:solidFill>
-                      <a:schemeClr val="accent6"/>
-                    </a:solidFill>
-                  </a:tcPr>
-                </a:tc>
-                <a:tc>
-                  <a:txBody>
-                    <a:bodyPr/>
-                    <a:lstStyle/>
-                    <a:p>
-                      <a:endParaRPr sz="900" dirty="0">
-                        <a:latin typeface="Pretendard" panose="02000503000000020004" pitchFamily="2" charset="-127"/>
-                        <a:ea typeface="Pretendard" panose="02000503000000020004" pitchFamily="2" charset="-127"/>
-                        <a:cs typeface="Pretendard" panose="02000503000000020004" pitchFamily="2" charset="-127"/>
-                      </a:endParaRPr>
-                    </a:p>
-                  </a:txBody>
-                  <a:tcPr marL="6191" marR="6191" marT="6191" marB="0" anchor="b">
-                    <a:solidFill>
-                      <a:schemeClr val="accent6"/>
-                    </a:solidFill>
-                  </a:tcPr>
-                </a:tc>
-                <a:extLst>
-                  <a:ext uri="{0D108BD9-81ED-4DB2-BD59-A6C34878D82A}">
-                    <a16:rowId xmlns:a16="http://schemas.microsoft.com/office/drawing/2014/main" val="1186525500"/>
-                  </a:ext>
-                </a:extLst>
-              </a:tr>
-              <a:tr h="160973">
-                <a:tc>
-                  <a:txBody>
-                    <a:bodyPr/>
-                    <a:lstStyle/>
-                    <a:p>
-                      <a:endParaRPr sz="900">
-                        <a:latin typeface="Pretendard" panose="02000503000000020004" pitchFamily="2" charset="-127"/>
-                        <a:ea typeface="Pretendard" panose="02000503000000020004" pitchFamily="2" charset="-127"/>
-                        <a:cs typeface="Pretendard" panose="02000503000000020004" pitchFamily="2" charset="-127"/>
-                      </a:endParaRPr>
-                    </a:p>
-                  </a:txBody>
-                  <a:tcPr marL="6191" marR="6191" marT="6191" marB="0" anchor="b">
-                    <a:solidFill>
-                      <a:schemeClr val="accent6"/>
-                    </a:solidFill>
-                  </a:tcPr>
-                </a:tc>
-                <a:tc>
-                  <a:txBody>
-                    <a:bodyPr/>
-                    <a:lstStyle/>
-                    <a:p>
-                      <a:endParaRPr sz="900" dirty="0">
-                        <a:latin typeface="Pretendard" panose="02000503000000020004" pitchFamily="2" charset="-127"/>
-                        <a:ea typeface="Pretendard" panose="02000503000000020004" pitchFamily="2" charset="-127"/>
-                        <a:cs typeface="Pretendard" panose="02000503000000020004" pitchFamily="2" charset="-127"/>
-                      </a:endParaRPr>
-                    </a:p>
-                  </a:txBody>
-                  <a:tcPr marL="6191" marR="6191" marT="6191" marB="0" anchor="b">
-                    <a:solidFill>
-                      <a:schemeClr val="accent6"/>
-                    </a:solidFill>
-                  </a:tcPr>
-                </a:tc>
-                <a:extLst>
-                  <a:ext uri="{0D108BD9-81ED-4DB2-BD59-A6C34878D82A}">
-                    <a16:rowId xmlns:a16="http://schemas.microsoft.com/office/drawing/2014/main" val="871243760"/>
-                  </a:ext>
-                </a:extLst>
-              </a:tr>
-            </a:tbl>
-          </a:graphicData>
-        </a:graphic>
-      </p:graphicFrame>
     </p:spTree>
     <p:extLst>
       <p:ext uri="{BB962C8B-B14F-4D97-AF65-F5344CB8AC3E}">
@@ -7986,138 +7016,6 @@
           </a:fontRef>
         </p:style>
       </p:cxnSp>
-      <p:sp>
-        <p:nvSpPr>
-          <p:cNvPr id="7" name="TextBox 6">
-            <a:extLst>
-              <a:ext uri="{FF2B5EF4-FFF2-40B4-BE49-F238E27FC236}">
-                <a16:creationId xmlns:a16="http://schemas.microsoft.com/office/drawing/2014/main" id="{1D881F1A-973B-9C67-C9EB-236168DE4FDD}"/>
-              </a:ext>
-            </a:extLst>
-          </p:cNvPr>
-          <p:cNvSpPr txBox="1"/>
-          <p:nvPr/>
-        </p:nvSpPr>
-        <p:spPr>
-          <a:xfrm>
-            <a:off x="310895" y="504183"/>
-            <a:ext cx="8160005" cy="381579"/>
-          </a:xfrm>
-          <a:prstGeom prst="rect">
-            <a:avLst/>
-          </a:prstGeom>
-          <a:noFill/>
-        </p:spPr>
-        <p:txBody>
-          <a:bodyPr wrap="square">
-            <a:spAutoFit/>
-          </a:bodyPr>
-          <a:lstStyle/>
-          <a:p>
-            <a:pPr>
-              <a:lnSpc>
-                <a:spcPct val="110000"/>
-              </a:lnSpc>
-              <a:defRPr/>
-            </a:pPr>
-            <a:r>
-              <a:rPr lang="en-US" altLang="ko-KR" b="1" dirty="0" err="1">
-                <a:solidFill>
-                  <a:schemeClr val="tx1">
-                    <a:lumMod val="65000"/>
-                    <a:lumOff val="35000"/>
-                  </a:schemeClr>
-                </a:solidFill>
-                <a:latin typeface="Arial" panose="020B0604020202020204" pitchFamily="34" charset="0"/>
-                <a:ea typeface="KoPub돋움체 Bold" panose="02020603020101020101" pitchFamily="18" charset="-127"/>
-                <a:cs typeface="Arial" panose="020B0604020202020204" pitchFamily="34" charset="0"/>
-              </a:rPr>
-              <a:t>CLiCK</a:t>
-            </a:r>
-            <a:r>
-              <a:rPr lang="en-US" altLang="ko-KR" b="1" dirty="0">
-                <a:solidFill>
-                  <a:schemeClr val="tx1">
-                    <a:lumMod val="65000"/>
-                    <a:lumOff val="35000"/>
-                  </a:schemeClr>
-                </a:solidFill>
-                <a:latin typeface="Arial" panose="020B0604020202020204" pitchFamily="34" charset="0"/>
-                <a:ea typeface="KoPub돋움체 Bold" panose="02020603020101020101" pitchFamily="18" charset="-127"/>
-                <a:cs typeface="Arial" panose="020B0604020202020204" pitchFamily="34" charset="0"/>
-              </a:rPr>
-              <a:t> IAM MICRO _ Competency Analysis</a:t>
-            </a:r>
-            <a:r>
-              <a:rPr lang="ko-KR" altLang="en-US" b="1" dirty="0">
-                <a:solidFill>
-                  <a:schemeClr val="tx1">
-                    <a:lumMod val="65000"/>
-                    <a:lumOff val="35000"/>
-                  </a:schemeClr>
-                </a:solidFill>
-                <a:latin typeface="Arial" panose="020B0604020202020204" pitchFamily="34" charset="0"/>
-                <a:ea typeface="KoPub돋움체 Bold" panose="02020603020101020101" pitchFamily="18" charset="-127"/>
-                <a:cs typeface="Arial" panose="020B0604020202020204" pitchFamily="34" charset="0"/>
-              </a:rPr>
-              <a:t> </a:t>
-            </a:r>
-            <a:r>
-              <a:rPr lang="en-US" altLang="ko-KR" b="1" dirty="0">
-                <a:solidFill>
-                  <a:schemeClr val="tx1">
-                    <a:lumMod val="65000"/>
-                    <a:lumOff val="35000"/>
-                  </a:schemeClr>
-                </a:solidFill>
-                <a:latin typeface="Arial" panose="020B0604020202020204" pitchFamily="34" charset="0"/>
-                <a:ea typeface="KoPub돋움체 Bold" panose="02020603020101020101" pitchFamily="18" charset="-127"/>
-                <a:cs typeface="Arial" panose="020B0604020202020204" pitchFamily="34" charset="0"/>
-              </a:rPr>
-              <a:t>_</a:t>
-            </a:r>
-            <a:r>
-              <a:rPr lang="ko-KR" altLang="en-US" b="1" dirty="0">
-                <a:solidFill>
-                  <a:schemeClr val="tx1">
-                    <a:lumMod val="65000"/>
-                    <a:lumOff val="35000"/>
-                  </a:schemeClr>
-                </a:solidFill>
-                <a:latin typeface="Arial" panose="020B0604020202020204" pitchFamily="34" charset="0"/>
-                <a:ea typeface="KoPub돋움체 Bold" panose="02020603020101020101" pitchFamily="18" charset="-127"/>
-                <a:cs typeface="Arial" panose="020B0604020202020204" pitchFamily="34" charset="0"/>
-              </a:rPr>
-              <a:t> 리더십 영향력 진단</a:t>
-            </a:r>
-            <a:r>
-              <a:rPr lang="en-US" altLang="ko-KR" b="1" dirty="0">
-                <a:solidFill>
-                  <a:schemeClr val="tx1">
-                    <a:lumMod val="65000"/>
-                    <a:lumOff val="35000"/>
-                  </a:schemeClr>
-                </a:solidFill>
-                <a:latin typeface="Arial" panose="020B0604020202020204" pitchFamily="34" charset="0"/>
-                <a:ea typeface="KoPub돋움체 Bold" panose="02020603020101020101" pitchFamily="18" charset="-127"/>
-                <a:cs typeface="Arial" panose="020B0604020202020204" pitchFamily="34" charset="0"/>
-              </a:rPr>
-              <a:t> _</a:t>
-            </a:r>
-            <a:endParaRPr lang="ko-KR" altLang="en-US" b="1" dirty="0">
-              <a:solidFill>
-                <a:schemeClr val="tx1">
-                  <a:lumMod val="65000"/>
-                  <a:lumOff val="35000"/>
-                </a:schemeClr>
-              </a:solidFill>
-              <a:latin typeface="Arial" panose="020B0604020202020204" pitchFamily="34" charset="0"/>
-              <a:ea typeface="KoPub돋움체 Bold" panose="02020603020101020101" pitchFamily="18" charset="-127"/>
-              <a:cs typeface="Arial" panose="020B0604020202020204" pitchFamily="34" charset="0"/>
-            </a:endParaRPr>
-          </a:p>
-        </p:txBody>
-      </p:sp>
       <p:pic>
         <p:nvPicPr>
           <p:cNvPr id="11" name="circle1">
@@ -9110,10 +8008,10 @@
       </p:pic>
       <p:sp>
         <p:nvSpPr>
-          <p:cNvPr id="6" name="text_NAME">
+          <p:cNvPr id="5" name="TextBox 4">
             <a:extLst>
               <a:ext uri="{FF2B5EF4-FFF2-40B4-BE49-F238E27FC236}">
-                <a16:creationId xmlns:a16="http://schemas.microsoft.com/office/drawing/2014/main" id="{F7CE973D-2AD7-89D4-5540-2BA30506B5D4}"/>
+                <a16:creationId xmlns:a16="http://schemas.microsoft.com/office/drawing/2014/main" id="{A8C21A72-E2F3-DFD5-BAAB-31F44D40A4D9}"/>
               </a:ext>
             </a:extLst>
           </p:cNvPr>
@@ -9122,8 +8020,8 @@
         </p:nvSpPr>
         <p:spPr>
           <a:xfrm>
-            <a:off x="7189764" y="510306"/>
-            <a:ext cx="1134104" cy="369332"/>
+            <a:off x="310895" y="504183"/>
+            <a:ext cx="8160005" cy="381579"/>
           </a:xfrm>
           <a:prstGeom prst="rect">
             <a:avLst/>
@@ -9136,6 +8034,26 @@
           </a:bodyPr>
           <a:lstStyle/>
           <a:p>
+            <a:pPr>
+              <a:lnSpc>
+                <a:spcPct val="110000"/>
+              </a:lnSpc>
+              <a:defRPr/>
+            </a:pPr>
+            <a:r>
+              <a:rPr lang="en-US" altLang="ko-KR" b="1" dirty="0" err="1">
+                <a:solidFill>
+                  <a:schemeClr val="tx1">
+                    <a:lumMod val="65000"/>
+                    <a:lumOff val="35000"/>
+                  </a:schemeClr>
+                </a:solidFill>
+                <a:latin typeface="Arial" panose="020B0604020202020204" pitchFamily="34" charset="0"/>
+                <a:ea typeface="KoPub돋움체 Bold" panose="02020603020101020101" pitchFamily="18" charset="-127"/>
+                <a:cs typeface="Arial" panose="020B0604020202020204" pitchFamily="34" charset="0"/>
+              </a:rPr>
+              <a:t>CLiCK</a:t>
+            </a:r>
             <a:r>
               <a:rPr lang="en-US" altLang="ko-KR" b="1" dirty="0">
                 <a:solidFill>
@@ -9148,914 +8066,68 @@
                 <a:ea typeface="KoPub돋움체 Bold" panose="02020603020101020101" pitchFamily="18" charset="-127"/>
                 <a:cs typeface="Arial" panose="020B0604020202020204" pitchFamily="34" charset="0"/>
               </a:rPr>
-              <a:t>{{NAME}}</a:t>
+              <a:t> IAM MICRO _ Competency Analysis</a:t>
+            </a:r>
+            <a:r>
+              <a:rPr lang="ko-KR" altLang="en-US" b="1" dirty="0">
+                <a:solidFill>
+                  <a:schemeClr val="tx1">
+                    <a:lumMod val="65000"/>
+                    <a:lumOff val="35000"/>
+                  </a:schemeClr>
+                </a:solidFill>
+                <a:latin typeface="Arial" panose="020B0604020202020204" pitchFamily="34" charset="0"/>
+                <a:ea typeface="KoPub돋움체 Bold" panose="02020603020101020101" pitchFamily="18" charset="-127"/>
+                <a:cs typeface="Arial" panose="020B0604020202020204" pitchFamily="34" charset="0"/>
+              </a:rPr>
+              <a:t> </a:t>
+            </a:r>
+            <a:r>
+              <a:rPr lang="en-US" altLang="ko-KR" b="1" dirty="0">
+                <a:solidFill>
+                  <a:schemeClr val="tx1">
+                    <a:lumMod val="65000"/>
+                    <a:lumOff val="35000"/>
+                  </a:schemeClr>
+                </a:solidFill>
+                <a:latin typeface="Arial" panose="020B0604020202020204" pitchFamily="34" charset="0"/>
+                <a:ea typeface="KoPub돋움체 Bold" panose="02020603020101020101" pitchFamily="18" charset="-127"/>
+                <a:cs typeface="Arial" panose="020B0604020202020204" pitchFamily="34" charset="0"/>
+              </a:rPr>
+              <a:t>_</a:t>
+            </a:r>
+            <a:r>
+              <a:rPr lang="ko-KR" altLang="en-US" b="1" dirty="0">
+                <a:solidFill>
+                  <a:schemeClr val="tx1">
+                    <a:lumMod val="65000"/>
+                    <a:lumOff val="35000"/>
+                  </a:schemeClr>
+                </a:solidFill>
+                <a:latin typeface="Arial" panose="020B0604020202020204" pitchFamily="34" charset="0"/>
+                <a:ea typeface="KoPub돋움체 Bold" panose="02020603020101020101" pitchFamily="18" charset="-127"/>
+                <a:cs typeface="Arial" panose="020B0604020202020204" pitchFamily="34" charset="0"/>
+              </a:rPr>
+              <a:t> 리더십 영향력 진단</a:t>
+            </a:r>
+            <a:r>
+              <a:rPr lang="en-US" altLang="ko-KR" b="1" dirty="0">
+                <a:solidFill>
+                  <a:schemeClr val="tx1">
+                    <a:lumMod val="65000"/>
+                    <a:lumOff val="35000"/>
+                  </a:schemeClr>
+                </a:solidFill>
+                <a:latin typeface="Arial" panose="020B0604020202020204" pitchFamily="34" charset="0"/>
+                <a:ea typeface="KoPub돋움체 Bold" panose="02020603020101020101" pitchFamily="18" charset="-127"/>
+                <a:cs typeface="Arial" panose="020B0604020202020204" pitchFamily="34" charset="0"/>
+              </a:rPr>
+              <a:t> _ {{NAME}}</a:t>
             </a:r>
             <a:endParaRPr lang="ko-KR" altLang="en-US" dirty="0"/>
           </a:p>
         </p:txBody>
       </p:sp>
-      <p:graphicFrame>
-        <p:nvGraphicFramePr>
-          <p:cNvPr id="8" name="table_phase">
-            <a:extLst>
-              <a:ext uri="{FF2B5EF4-FFF2-40B4-BE49-F238E27FC236}">
-                <a16:creationId xmlns:a16="http://schemas.microsoft.com/office/drawing/2014/main" id="{E5D54932-725F-0465-518B-A74AF30D1379}"/>
-              </a:ext>
-            </a:extLst>
-          </p:cNvPr>
-          <p:cNvGraphicFramePr>
-            <a:graphicFrameLocks noGrp="1"/>
-          </p:cNvGraphicFramePr>
-          <p:nvPr/>
-        </p:nvGraphicFramePr>
-        <p:xfrm>
-          <a:off x="-2057475" y="1108128"/>
-          <a:ext cx="1982269" cy="1126811"/>
-        </p:xfrm>
-        <a:graphic>
-          <a:graphicData uri="http://schemas.openxmlformats.org/drawingml/2006/table">
-            <a:tbl>
-              <a:tblPr>
-                <a:tableStyleId>{5C22544A-7EE6-4342-B048-85BDC9FD1C3A}</a:tableStyleId>
-              </a:tblPr>
-              <a:tblGrid>
-                <a:gridCol w="1168363">
-                  <a:extLst>
-                    <a:ext uri="{9D8B030D-6E8A-4147-A177-3AD203B41FA5}">
-                      <a16:colId xmlns:a16="http://schemas.microsoft.com/office/drawing/2014/main" val="279838531"/>
-                    </a:ext>
-                  </a:extLst>
-                </a:gridCol>
-                <a:gridCol w="813906">
-                  <a:extLst>
-                    <a:ext uri="{9D8B030D-6E8A-4147-A177-3AD203B41FA5}">
-                      <a16:colId xmlns:a16="http://schemas.microsoft.com/office/drawing/2014/main" val="2355549984"/>
-                    </a:ext>
-                  </a:extLst>
-                </a:gridCol>
-              </a:tblGrid>
-              <a:tr h="160973">
-                <a:tc>
-                  <a:txBody>
-                    <a:bodyPr/>
-                    <a:lstStyle/>
-                    <a:p>
-                      <a:pPr algn="l" fontAlgn="b">
-                        <a:buNone/>
-                      </a:pPr>
-                      <a:r>
-                        <a:rPr lang="ko-KR" altLang="en-US" sz="900" b="0" i="0" u="none" strike="noStrike" dirty="0">
-                          <a:solidFill>
-                            <a:srgbClr val="000000"/>
-                          </a:solidFill>
-                          <a:effectLst/>
-                          <a:latin typeface="Pretendard" panose="02000503000000020004" pitchFamily="2" charset="-127"/>
-                          <a:ea typeface="Pretendard" panose="02000503000000020004" pitchFamily="2" charset="-127"/>
-                          <a:cs typeface="Pretendard" panose="02000503000000020004" pitchFamily="2" charset="-127"/>
-                        </a:rPr>
-                        <a:t>항목명</a:t>
-                      </a:r>
-                    </a:p>
-                  </a:txBody>
-                  <a:tcPr marL="6191" marR="6191" marT="6191" marB="0" anchor="b">
-                    <a:solidFill>
-                      <a:schemeClr val="accent6"/>
-                    </a:solidFill>
-                  </a:tcPr>
-                </a:tc>
-                <a:tc>
-                  <a:txBody>
-                    <a:bodyPr/>
-                    <a:lstStyle/>
-                    <a:p>
-                      <a:pPr algn="l" fontAlgn="b">
-                        <a:buNone/>
-                      </a:pPr>
-                      <a:r>
-                        <a:rPr lang="ko-KR" altLang="en-US" sz="900" b="0" i="0" u="none" strike="noStrike" dirty="0">
-                          <a:solidFill>
-                            <a:srgbClr val="000000"/>
-                          </a:solidFill>
-                          <a:effectLst/>
-                          <a:latin typeface="Pretendard" panose="02000503000000020004" pitchFamily="2" charset="-127"/>
-                          <a:ea typeface="Pretendard" panose="02000503000000020004" pitchFamily="2" charset="-127"/>
-                          <a:cs typeface="Pretendard" panose="02000503000000020004" pitchFamily="2" charset="-127"/>
-                        </a:rPr>
-                        <a:t>평균점수</a:t>
-                      </a:r>
-                    </a:p>
-                  </a:txBody>
-                  <a:tcPr marL="6191" marR="6191" marT="6191" marB="0" anchor="b">
-                    <a:solidFill>
-                      <a:schemeClr val="accent6"/>
-                    </a:solidFill>
-                  </a:tcPr>
-                </a:tc>
-                <a:extLst>
-                  <a:ext uri="{0D108BD9-81ED-4DB2-BD59-A6C34878D82A}">
-                    <a16:rowId xmlns:a16="http://schemas.microsoft.com/office/drawing/2014/main" val="205790897"/>
-                  </a:ext>
-                </a:extLst>
-              </a:tr>
-              <a:tr h="160973">
-                <a:tc>
-                  <a:txBody>
-                    <a:bodyPr/>
-                    <a:lstStyle/>
-                    <a:p>
-                      <a:endParaRPr sz="900" dirty="0">
-                        <a:latin typeface="Pretendard" panose="02000503000000020004" pitchFamily="2" charset="-127"/>
-                        <a:ea typeface="Pretendard" panose="02000503000000020004" pitchFamily="2" charset="-127"/>
-                        <a:cs typeface="Pretendard" panose="02000503000000020004" pitchFamily="2" charset="-127"/>
-                      </a:endParaRPr>
-                    </a:p>
-                  </a:txBody>
-                  <a:tcPr marL="6191" marR="6191" marT="6191" marB="0" anchor="b">
-                    <a:solidFill>
-                      <a:schemeClr val="accent6"/>
-                    </a:solidFill>
-                  </a:tcPr>
-                </a:tc>
-                <a:tc>
-                  <a:txBody>
-                    <a:bodyPr/>
-                    <a:lstStyle/>
-                    <a:p>
-                      <a:endParaRPr sz="900">
-                        <a:latin typeface="Pretendard" panose="02000503000000020004" pitchFamily="2" charset="-127"/>
-                        <a:ea typeface="Pretendard" panose="02000503000000020004" pitchFamily="2" charset="-127"/>
-                        <a:cs typeface="Pretendard" panose="02000503000000020004" pitchFamily="2" charset="-127"/>
-                      </a:endParaRPr>
-                    </a:p>
-                  </a:txBody>
-                  <a:tcPr marL="6191" marR="6191" marT="6191" marB="0" anchor="b">
-                    <a:solidFill>
-                      <a:schemeClr val="accent6"/>
-                    </a:solidFill>
-                  </a:tcPr>
-                </a:tc>
-                <a:extLst>
-                  <a:ext uri="{0D108BD9-81ED-4DB2-BD59-A6C34878D82A}">
-                    <a16:rowId xmlns:a16="http://schemas.microsoft.com/office/drawing/2014/main" val="1753715540"/>
-                  </a:ext>
-                </a:extLst>
-              </a:tr>
-              <a:tr h="160973">
-                <a:tc>
-                  <a:txBody>
-                    <a:bodyPr/>
-                    <a:lstStyle/>
-                    <a:p>
-                      <a:endParaRPr sz="900" dirty="0">
-                        <a:latin typeface="Pretendard" panose="02000503000000020004" pitchFamily="2" charset="-127"/>
-                        <a:ea typeface="Pretendard" panose="02000503000000020004" pitchFamily="2" charset="-127"/>
-                        <a:cs typeface="Pretendard" panose="02000503000000020004" pitchFamily="2" charset="-127"/>
-                      </a:endParaRPr>
-                    </a:p>
-                  </a:txBody>
-                  <a:tcPr marL="6191" marR="6191" marT="6191" marB="0" anchor="b">
-                    <a:solidFill>
-                      <a:schemeClr val="accent6"/>
-                    </a:solidFill>
-                  </a:tcPr>
-                </a:tc>
-                <a:tc>
-                  <a:txBody>
-                    <a:bodyPr/>
-                    <a:lstStyle/>
-                    <a:p>
-                      <a:endParaRPr sz="900" dirty="0">
-                        <a:latin typeface="Pretendard" panose="02000503000000020004" pitchFamily="2" charset="-127"/>
-                        <a:ea typeface="Pretendard" panose="02000503000000020004" pitchFamily="2" charset="-127"/>
-                        <a:cs typeface="Pretendard" panose="02000503000000020004" pitchFamily="2" charset="-127"/>
-                      </a:endParaRPr>
-                    </a:p>
-                  </a:txBody>
-                  <a:tcPr marL="6191" marR="6191" marT="6191" marB="0" anchor="b">
-                    <a:solidFill>
-                      <a:schemeClr val="accent6"/>
-                    </a:solidFill>
-                  </a:tcPr>
-                </a:tc>
-                <a:extLst>
-                  <a:ext uri="{0D108BD9-81ED-4DB2-BD59-A6C34878D82A}">
-                    <a16:rowId xmlns:a16="http://schemas.microsoft.com/office/drawing/2014/main" val="1982899589"/>
-                  </a:ext>
-                </a:extLst>
-              </a:tr>
-              <a:tr h="160973">
-                <a:tc>
-                  <a:txBody>
-                    <a:bodyPr/>
-                    <a:lstStyle/>
-                    <a:p>
-                      <a:endParaRPr sz="900">
-                        <a:latin typeface="Pretendard" panose="02000503000000020004" pitchFamily="2" charset="-127"/>
-                        <a:ea typeface="Pretendard" panose="02000503000000020004" pitchFamily="2" charset="-127"/>
-                        <a:cs typeface="Pretendard" panose="02000503000000020004" pitchFamily="2" charset="-127"/>
-                      </a:endParaRPr>
-                    </a:p>
-                  </a:txBody>
-                  <a:tcPr marL="6191" marR="6191" marT="6191" marB="0" anchor="b">
-                    <a:solidFill>
-                      <a:schemeClr val="accent6"/>
-                    </a:solidFill>
-                  </a:tcPr>
-                </a:tc>
-                <a:tc>
-                  <a:txBody>
-                    <a:bodyPr/>
-                    <a:lstStyle/>
-                    <a:p>
-                      <a:endParaRPr sz="900" dirty="0">
-                        <a:latin typeface="Pretendard" panose="02000503000000020004" pitchFamily="2" charset="-127"/>
-                        <a:ea typeface="Pretendard" panose="02000503000000020004" pitchFamily="2" charset="-127"/>
-                        <a:cs typeface="Pretendard" panose="02000503000000020004" pitchFamily="2" charset="-127"/>
-                      </a:endParaRPr>
-                    </a:p>
-                  </a:txBody>
-                  <a:tcPr marL="6191" marR="6191" marT="6191" marB="0" anchor="b">
-                    <a:solidFill>
-                      <a:schemeClr val="accent6"/>
-                    </a:solidFill>
-                  </a:tcPr>
-                </a:tc>
-                <a:extLst>
-                  <a:ext uri="{0D108BD9-81ED-4DB2-BD59-A6C34878D82A}">
-                    <a16:rowId xmlns:a16="http://schemas.microsoft.com/office/drawing/2014/main" val="3629806957"/>
-                  </a:ext>
-                </a:extLst>
-              </a:tr>
-              <a:tr h="160973">
-                <a:tc>
-                  <a:txBody>
-                    <a:bodyPr/>
-                    <a:lstStyle/>
-                    <a:p>
-                      <a:endParaRPr sz="900" dirty="0">
-                        <a:latin typeface="Pretendard" panose="02000503000000020004" pitchFamily="2" charset="-127"/>
-                        <a:ea typeface="Pretendard" panose="02000503000000020004" pitchFamily="2" charset="-127"/>
-                        <a:cs typeface="Pretendard" panose="02000503000000020004" pitchFamily="2" charset="-127"/>
-                      </a:endParaRPr>
-                    </a:p>
-                  </a:txBody>
-                  <a:tcPr marL="6191" marR="6191" marT="6191" marB="0" anchor="b">
-                    <a:solidFill>
-                      <a:schemeClr val="accent6"/>
-                    </a:solidFill>
-                  </a:tcPr>
-                </a:tc>
-                <a:tc>
-                  <a:txBody>
-                    <a:bodyPr/>
-                    <a:lstStyle/>
-                    <a:p>
-                      <a:endParaRPr sz="900" dirty="0">
-                        <a:latin typeface="Pretendard" panose="02000503000000020004" pitchFamily="2" charset="-127"/>
-                        <a:ea typeface="Pretendard" panose="02000503000000020004" pitchFamily="2" charset="-127"/>
-                        <a:cs typeface="Pretendard" panose="02000503000000020004" pitchFamily="2" charset="-127"/>
-                      </a:endParaRPr>
-                    </a:p>
-                  </a:txBody>
-                  <a:tcPr marL="6191" marR="6191" marT="6191" marB="0" anchor="b">
-                    <a:solidFill>
-                      <a:schemeClr val="accent6"/>
-                    </a:solidFill>
-                  </a:tcPr>
-                </a:tc>
-                <a:extLst>
-                  <a:ext uri="{0D108BD9-81ED-4DB2-BD59-A6C34878D82A}">
-                    <a16:rowId xmlns:a16="http://schemas.microsoft.com/office/drawing/2014/main" val="2543043573"/>
-                  </a:ext>
-                </a:extLst>
-              </a:tr>
-              <a:tr h="160973">
-                <a:tc>
-                  <a:txBody>
-                    <a:bodyPr/>
-                    <a:lstStyle/>
-                    <a:p>
-                      <a:endParaRPr sz="900" dirty="0">
-                        <a:latin typeface="Pretendard" panose="02000503000000020004" pitchFamily="2" charset="-127"/>
-                        <a:ea typeface="Pretendard" panose="02000503000000020004" pitchFamily="2" charset="-127"/>
-                        <a:cs typeface="Pretendard" panose="02000503000000020004" pitchFamily="2" charset="-127"/>
-                      </a:endParaRPr>
-                    </a:p>
-                  </a:txBody>
-                  <a:tcPr marL="6191" marR="6191" marT="6191" marB="0" anchor="b">
-                    <a:solidFill>
-                      <a:schemeClr val="accent6"/>
-                    </a:solidFill>
-                  </a:tcPr>
-                </a:tc>
-                <a:tc>
-                  <a:txBody>
-                    <a:bodyPr/>
-                    <a:lstStyle/>
-                    <a:p>
-                      <a:endParaRPr sz="900" dirty="0">
-                        <a:latin typeface="Pretendard" panose="02000503000000020004" pitchFamily="2" charset="-127"/>
-                        <a:ea typeface="Pretendard" panose="02000503000000020004" pitchFamily="2" charset="-127"/>
-                        <a:cs typeface="Pretendard" panose="02000503000000020004" pitchFamily="2" charset="-127"/>
-                      </a:endParaRPr>
-                    </a:p>
-                  </a:txBody>
-                  <a:tcPr marL="6191" marR="6191" marT="6191" marB="0" anchor="b">
-                    <a:solidFill>
-                      <a:schemeClr val="accent6"/>
-                    </a:solidFill>
-                  </a:tcPr>
-                </a:tc>
-                <a:extLst>
-                  <a:ext uri="{0D108BD9-81ED-4DB2-BD59-A6C34878D82A}">
-                    <a16:rowId xmlns:a16="http://schemas.microsoft.com/office/drawing/2014/main" val="3007960184"/>
-                  </a:ext>
-                </a:extLst>
-              </a:tr>
-              <a:tr h="160973">
-                <a:tc>
-                  <a:txBody>
-                    <a:bodyPr/>
-                    <a:lstStyle/>
-                    <a:p>
-                      <a:endParaRPr sz="900">
-                        <a:latin typeface="Pretendard" panose="02000503000000020004" pitchFamily="2" charset="-127"/>
-                        <a:ea typeface="Pretendard" panose="02000503000000020004" pitchFamily="2" charset="-127"/>
-                        <a:cs typeface="Pretendard" panose="02000503000000020004" pitchFamily="2" charset="-127"/>
-                      </a:endParaRPr>
-                    </a:p>
-                  </a:txBody>
-                  <a:tcPr marL="6191" marR="6191" marT="6191" marB="0" anchor="b">
-                    <a:solidFill>
-                      <a:schemeClr val="accent6"/>
-                    </a:solidFill>
-                  </a:tcPr>
-                </a:tc>
-                <a:tc>
-                  <a:txBody>
-                    <a:bodyPr/>
-                    <a:lstStyle/>
-                    <a:p>
-                      <a:endParaRPr sz="900" dirty="0">
-                        <a:latin typeface="Pretendard" panose="02000503000000020004" pitchFamily="2" charset="-127"/>
-                        <a:ea typeface="Pretendard" panose="02000503000000020004" pitchFamily="2" charset="-127"/>
-                        <a:cs typeface="Pretendard" panose="02000503000000020004" pitchFamily="2" charset="-127"/>
-                      </a:endParaRPr>
-                    </a:p>
-                  </a:txBody>
-                  <a:tcPr marL="6191" marR="6191" marT="6191" marB="0" anchor="b">
-                    <a:solidFill>
-                      <a:schemeClr val="accent6"/>
-                    </a:solidFill>
-                  </a:tcPr>
-                </a:tc>
-                <a:extLst>
-                  <a:ext uri="{0D108BD9-81ED-4DB2-BD59-A6C34878D82A}">
-                    <a16:rowId xmlns:a16="http://schemas.microsoft.com/office/drawing/2014/main" val="871243760"/>
-                  </a:ext>
-                </a:extLst>
-              </a:tr>
-            </a:tbl>
-          </a:graphicData>
-        </a:graphic>
-      </p:graphicFrame>
-      <p:graphicFrame>
-        <p:nvGraphicFramePr>
-          <p:cNvPr id="9" name="table_strategy">
-            <a:extLst>
-              <a:ext uri="{FF2B5EF4-FFF2-40B4-BE49-F238E27FC236}">
-                <a16:creationId xmlns:a16="http://schemas.microsoft.com/office/drawing/2014/main" id="{20DFD45B-2F28-E1DA-F195-03135C10BB71}"/>
-              </a:ext>
-            </a:extLst>
-          </p:cNvPr>
-          <p:cNvGraphicFramePr>
-            <a:graphicFrameLocks noGrp="1"/>
-          </p:cNvGraphicFramePr>
-          <p:nvPr/>
-        </p:nvGraphicFramePr>
-        <p:xfrm>
-          <a:off x="-2057476" y="4665754"/>
-          <a:ext cx="1982269" cy="1770703"/>
-        </p:xfrm>
-        <a:graphic>
-          <a:graphicData uri="http://schemas.openxmlformats.org/drawingml/2006/table">
-            <a:tbl>
-              <a:tblPr>
-                <a:tableStyleId>{5C22544A-7EE6-4342-B048-85BDC9FD1C3A}</a:tableStyleId>
-              </a:tblPr>
-              <a:tblGrid>
-                <a:gridCol w="1168363">
-                  <a:extLst>
-                    <a:ext uri="{9D8B030D-6E8A-4147-A177-3AD203B41FA5}">
-                      <a16:colId xmlns:a16="http://schemas.microsoft.com/office/drawing/2014/main" val="279838531"/>
-                    </a:ext>
-                  </a:extLst>
-                </a:gridCol>
-                <a:gridCol w="813906">
-                  <a:extLst>
-                    <a:ext uri="{9D8B030D-6E8A-4147-A177-3AD203B41FA5}">
-                      <a16:colId xmlns:a16="http://schemas.microsoft.com/office/drawing/2014/main" val="2355549984"/>
-                    </a:ext>
-                  </a:extLst>
-                </a:gridCol>
-              </a:tblGrid>
-              <a:tr h="160973">
-                <a:tc>
-                  <a:txBody>
-                    <a:bodyPr/>
-                    <a:lstStyle/>
-                    <a:p>
-                      <a:pPr algn="l" fontAlgn="b">
-                        <a:buNone/>
-                      </a:pPr>
-                      <a:r>
-                        <a:rPr lang="ko-KR" altLang="en-US" sz="900" b="0" i="0" u="none" strike="noStrike" dirty="0">
-                          <a:solidFill>
-                            <a:srgbClr val="000000"/>
-                          </a:solidFill>
-                          <a:effectLst/>
-                          <a:latin typeface="Pretendard" panose="02000503000000020004" pitchFamily="2" charset="-127"/>
-                          <a:ea typeface="Pretendard" panose="02000503000000020004" pitchFamily="2" charset="-127"/>
-                          <a:cs typeface="Pretendard" panose="02000503000000020004" pitchFamily="2" charset="-127"/>
-                        </a:rPr>
-                        <a:t>항목명</a:t>
-                      </a:r>
-                    </a:p>
-                  </a:txBody>
-                  <a:tcPr marL="6191" marR="6191" marT="6191" marB="0" anchor="b">
-                    <a:solidFill>
-                      <a:schemeClr val="accent6"/>
-                    </a:solidFill>
-                  </a:tcPr>
-                </a:tc>
-                <a:tc>
-                  <a:txBody>
-                    <a:bodyPr/>
-                    <a:lstStyle/>
-                    <a:p>
-                      <a:pPr algn="l" fontAlgn="b">
-                        <a:buNone/>
-                      </a:pPr>
-                      <a:r>
-                        <a:rPr lang="ko-KR" altLang="en-US" sz="900" b="0" i="0" u="none" strike="noStrike" dirty="0">
-                          <a:solidFill>
-                            <a:srgbClr val="000000"/>
-                          </a:solidFill>
-                          <a:effectLst/>
-                          <a:latin typeface="Pretendard" panose="02000503000000020004" pitchFamily="2" charset="-127"/>
-                          <a:ea typeface="Pretendard" panose="02000503000000020004" pitchFamily="2" charset="-127"/>
-                          <a:cs typeface="Pretendard" panose="02000503000000020004" pitchFamily="2" charset="-127"/>
-                        </a:rPr>
-                        <a:t>평균점수</a:t>
-                      </a:r>
-                    </a:p>
-                  </a:txBody>
-                  <a:tcPr marL="6191" marR="6191" marT="6191" marB="0" anchor="b">
-                    <a:solidFill>
-                      <a:schemeClr val="accent6"/>
-                    </a:solidFill>
-                  </a:tcPr>
-                </a:tc>
-                <a:extLst>
-                  <a:ext uri="{0D108BD9-81ED-4DB2-BD59-A6C34878D82A}">
-                    <a16:rowId xmlns:a16="http://schemas.microsoft.com/office/drawing/2014/main" val="205790897"/>
-                  </a:ext>
-                </a:extLst>
-              </a:tr>
-              <a:tr h="160973">
-                <a:tc>
-                  <a:txBody>
-                    <a:bodyPr/>
-                    <a:lstStyle/>
-                    <a:p>
-                      <a:endParaRPr sz="900" dirty="0">
-                        <a:latin typeface="Pretendard" panose="02000503000000020004" pitchFamily="2" charset="-127"/>
-                        <a:ea typeface="Pretendard" panose="02000503000000020004" pitchFamily="2" charset="-127"/>
-                        <a:cs typeface="Pretendard" panose="02000503000000020004" pitchFamily="2" charset="-127"/>
-                      </a:endParaRPr>
-                    </a:p>
-                  </a:txBody>
-                  <a:tcPr marL="6191" marR="6191" marT="6191" marB="0" anchor="b">
-                    <a:solidFill>
-                      <a:schemeClr val="accent6"/>
-                    </a:solidFill>
-                  </a:tcPr>
-                </a:tc>
-                <a:tc>
-                  <a:txBody>
-                    <a:bodyPr/>
-                    <a:lstStyle/>
-                    <a:p>
-                      <a:endParaRPr sz="900">
-                        <a:latin typeface="Pretendard" panose="02000503000000020004" pitchFamily="2" charset="-127"/>
-                        <a:ea typeface="Pretendard" panose="02000503000000020004" pitchFamily="2" charset="-127"/>
-                        <a:cs typeface="Pretendard" panose="02000503000000020004" pitchFamily="2" charset="-127"/>
-                      </a:endParaRPr>
-                    </a:p>
-                  </a:txBody>
-                  <a:tcPr marL="6191" marR="6191" marT="6191" marB="0" anchor="b">
-                    <a:solidFill>
-                      <a:schemeClr val="accent6"/>
-                    </a:solidFill>
-                  </a:tcPr>
-                </a:tc>
-                <a:extLst>
-                  <a:ext uri="{0D108BD9-81ED-4DB2-BD59-A6C34878D82A}">
-                    <a16:rowId xmlns:a16="http://schemas.microsoft.com/office/drawing/2014/main" val="1753715540"/>
-                  </a:ext>
-                </a:extLst>
-              </a:tr>
-              <a:tr h="160973">
-                <a:tc>
-                  <a:txBody>
-                    <a:bodyPr/>
-                    <a:lstStyle/>
-                    <a:p>
-                      <a:endParaRPr sz="900" dirty="0">
-                        <a:latin typeface="Pretendard" panose="02000503000000020004" pitchFamily="2" charset="-127"/>
-                        <a:ea typeface="Pretendard" panose="02000503000000020004" pitchFamily="2" charset="-127"/>
-                        <a:cs typeface="Pretendard" panose="02000503000000020004" pitchFamily="2" charset="-127"/>
-                      </a:endParaRPr>
-                    </a:p>
-                  </a:txBody>
-                  <a:tcPr marL="6191" marR="6191" marT="6191" marB="0" anchor="b">
-                    <a:solidFill>
-                      <a:schemeClr val="accent6"/>
-                    </a:solidFill>
-                  </a:tcPr>
-                </a:tc>
-                <a:tc>
-                  <a:txBody>
-                    <a:bodyPr/>
-                    <a:lstStyle/>
-                    <a:p>
-                      <a:endParaRPr sz="900" dirty="0">
-                        <a:latin typeface="Pretendard" panose="02000503000000020004" pitchFamily="2" charset="-127"/>
-                        <a:ea typeface="Pretendard" panose="02000503000000020004" pitchFamily="2" charset="-127"/>
-                        <a:cs typeface="Pretendard" panose="02000503000000020004" pitchFamily="2" charset="-127"/>
-                      </a:endParaRPr>
-                    </a:p>
-                  </a:txBody>
-                  <a:tcPr marL="6191" marR="6191" marT="6191" marB="0" anchor="b">
-                    <a:solidFill>
-                      <a:schemeClr val="accent6"/>
-                    </a:solidFill>
-                  </a:tcPr>
-                </a:tc>
-                <a:extLst>
-                  <a:ext uri="{0D108BD9-81ED-4DB2-BD59-A6C34878D82A}">
-                    <a16:rowId xmlns:a16="http://schemas.microsoft.com/office/drawing/2014/main" val="1982899589"/>
-                  </a:ext>
-                </a:extLst>
-              </a:tr>
-              <a:tr h="160973">
-                <a:tc>
-                  <a:txBody>
-                    <a:bodyPr/>
-                    <a:lstStyle/>
-                    <a:p>
-                      <a:endParaRPr sz="900">
-                        <a:latin typeface="Pretendard" panose="02000503000000020004" pitchFamily="2" charset="-127"/>
-                        <a:ea typeface="Pretendard" panose="02000503000000020004" pitchFamily="2" charset="-127"/>
-                        <a:cs typeface="Pretendard" panose="02000503000000020004" pitchFamily="2" charset="-127"/>
-                      </a:endParaRPr>
-                    </a:p>
-                  </a:txBody>
-                  <a:tcPr marL="6191" marR="6191" marT="6191" marB="0" anchor="b">
-                    <a:solidFill>
-                      <a:schemeClr val="accent6"/>
-                    </a:solidFill>
-                  </a:tcPr>
-                </a:tc>
-                <a:tc>
-                  <a:txBody>
-                    <a:bodyPr/>
-                    <a:lstStyle/>
-                    <a:p>
-                      <a:endParaRPr sz="900" dirty="0">
-                        <a:latin typeface="Pretendard" panose="02000503000000020004" pitchFamily="2" charset="-127"/>
-                        <a:ea typeface="Pretendard" panose="02000503000000020004" pitchFamily="2" charset="-127"/>
-                        <a:cs typeface="Pretendard" panose="02000503000000020004" pitchFamily="2" charset="-127"/>
-                      </a:endParaRPr>
-                    </a:p>
-                  </a:txBody>
-                  <a:tcPr marL="6191" marR="6191" marT="6191" marB="0" anchor="b">
-                    <a:solidFill>
-                      <a:schemeClr val="accent6"/>
-                    </a:solidFill>
-                  </a:tcPr>
-                </a:tc>
-                <a:extLst>
-                  <a:ext uri="{0D108BD9-81ED-4DB2-BD59-A6C34878D82A}">
-                    <a16:rowId xmlns:a16="http://schemas.microsoft.com/office/drawing/2014/main" val="3629806957"/>
-                  </a:ext>
-                </a:extLst>
-              </a:tr>
-              <a:tr h="160973">
-                <a:tc>
-                  <a:txBody>
-                    <a:bodyPr/>
-                    <a:lstStyle/>
-                    <a:p>
-                      <a:endParaRPr sz="900" dirty="0">
-                        <a:latin typeface="Pretendard" panose="02000503000000020004" pitchFamily="2" charset="-127"/>
-                        <a:ea typeface="Pretendard" panose="02000503000000020004" pitchFamily="2" charset="-127"/>
-                        <a:cs typeface="Pretendard" panose="02000503000000020004" pitchFamily="2" charset="-127"/>
-                      </a:endParaRPr>
-                    </a:p>
-                  </a:txBody>
-                  <a:tcPr marL="6191" marR="6191" marT="6191" marB="0" anchor="b">
-                    <a:solidFill>
-                      <a:schemeClr val="accent6"/>
-                    </a:solidFill>
-                  </a:tcPr>
-                </a:tc>
-                <a:tc>
-                  <a:txBody>
-                    <a:bodyPr/>
-                    <a:lstStyle/>
-                    <a:p>
-                      <a:endParaRPr sz="900" dirty="0">
-                        <a:latin typeface="Pretendard" panose="02000503000000020004" pitchFamily="2" charset="-127"/>
-                        <a:ea typeface="Pretendard" panose="02000503000000020004" pitchFamily="2" charset="-127"/>
-                        <a:cs typeface="Pretendard" panose="02000503000000020004" pitchFamily="2" charset="-127"/>
-                      </a:endParaRPr>
-                    </a:p>
-                  </a:txBody>
-                  <a:tcPr marL="6191" marR="6191" marT="6191" marB="0" anchor="b">
-                    <a:solidFill>
-                      <a:schemeClr val="accent6"/>
-                    </a:solidFill>
-                  </a:tcPr>
-                </a:tc>
-                <a:extLst>
-                  <a:ext uri="{0D108BD9-81ED-4DB2-BD59-A6C34878D82A}">
-                    <a16:rowId xmlns:a16="http://schemas.microsoft.com/office/drawing/2014/main" val="2543043573"/>
-                  </a:ext>
-                </a:extLst>
-              </a:tr>
-              <a:tr h="160973">
-                <a:tc>
-                  <a:txBody>
-                    <a:bodyPr/>
-                    <a:lstStyle/>
-                    <a:p>
-                      <a:endParaRPr sz="900" dirty="0">
-                        <a:latin typeface="Pretendard" panose="02000503000000020004" pitchFamily="2" charset="-127"/>
-                        <a:ea typeface="Pretendard" panose="02000503000000020004" pitchFamily="2" charset="-127"/>
-                        <a:cs typeface="Pretendard" panose="02000503000000020004" pitchFamily="2" charset="-127"/>
-                      </a:endParaRPr>
-                    </a:p>
-                  </a:txBody>
-                  <a:tcPr marL="6191" marR="6191" marT="6191" marB="0" anchor="b">
-                    <a:solidFill>
-                      <a:schemeClr val="accent6"/>
-                    </a:solidFill>
-                  </a:tcPr>
-                </a:tc>
-                <a:tc>
-                  <a:txBody>
-                    <a:bodyPr/>
-                    <a:lstStyle/>
-                    <a:p>
-                      <a:endParaRPr sz="900" dirty="0">
-                        <a:latin typeface="Pretendard" panose="02000503000000020004" pitchFamily="2" charset="-127"/>
-                        <a:ea typeface="Pretendard" panose="02000503000000020004" pitchFamily="2" charset="-127"/>
-                        <a:cs typeface="Pretendard" panose="02000503000000020004" pitchFamily="2" charset="-127"/>
-                      </a:endParaRPr>
-                    </a:p>
-                  </a:txBody>
-                  <a:tcPr marL="6191" marR="6191" marT="6191" marB="0" anchor="b">
-                    <a:solidFill>
-                      <a:schemeClr val="accent6"/>
-                    </a:solidFill>
-                  </a:tcPr>
-                </a:tc>
-                <a:extLst>
-                  <a:ext uri="{0D108BD9-81ED-4DB2-BD59-A6C34878D82A}">
-                    <a16:rowId xmlns:a16="http://schemas.microsoft.com/office/drawing/2014/main" val="3007960184"/>
-                  </a:ext>
-                </a:extLst>
-              </a:tr>
-              <a:tr h="160973">
-                <a:tc>
-                  <a:txBody>
-                    <a:bodyPr/>
-                    <a:lstStyle/>
-                    <a:p>
-                      <a:endParaRPr sz="900" dirty="0">
-                        <a:latin typeface="Pretendard" panose="02000503000000020004" pitchFamily="2" charset="-127"/>
-                        <a:ea typeface="Pretendard" panose="02000503000000020004" pitchFamily="2" charset="-127"/>
-                        <a:cs typeface="Pretendard" panose="02000503000000020004" pitchFamily="2" charset="-127"/>
-                      </a:endParaRPr>
-                    </a:p>
-                  </a:txBody>
-                  <a:tcPr marL="6191" marR="6191" marT="6191" marB="0" anchor="b">
-                    <a:solidFill>
-                      <a:schemeClr val="accent6"/>
-                    </a:solidFill>
-                  </a:tcPr>
-                </a:tc>
-                <a:tc>
-                  <a:txBody>
-                    <a:bodyPr/>
-                    <a:lstStyle/>
-                    <a:p>
-                      <a:endParaRPr sz="900" dirty="0">
-                        <a:latin typeface="Pretendard" panose="02000503000000020004" pitchFamily="2" charset="-127"/>
-                        <a:ea typeface="Pretendard" panose="02000503000000020004" pitchFamily="2" charset="-127"/>
-                        <a:cs typeface="Pretendard" panose="02000503000000020004" pitchFamily="2" charset="-127"/>
-                      </a:endParaRPr>
-                    </a:p>
-                  </a:txBody>
-                  <a:tcPr marL="6191" marR="6191" marT="6191" marB="0" anchor="b">
-                    <a:solidFill>
-                      <a:schemeClr val="accent6"/>
-                    </a:solidFill>
-                  </a:tcPr>
-                </a:tc>
-                <a:extLst>
-                  <a:ext uri="{0D108BD9-81ED-4DB2-BD59-A6C34878D82A}">
-                    <a16:rowId xmlns:a16="http://schemas.microsoft.com/office/drawing/2014/main" val="1074187918"/>
-                  </a:ext>
-                </a:extLst>
-              </a:tr>
-              <a:tr h="160973">
-                <a:tc>
-                  <a:txBody>
-                    <a:bodyPr/>
-                    <a:lstStyle/>
-                    <a:p>
-                      <a:endParaRPr sz="900" dirty="0">
-                        <a:latin typeface="Pretendard" panose="02000503000000020004" pitchFamily="2" charset="-127"/>
-                        <a:ea typeface="Pretendard" panose="02000503000000020004" pitchFamily="2" charset="-127"/>
-                        <a:cs typeface="Pretendard" panose="02000503000000020004" pitchFamily="2" charset="-127"/>
-                      </a:endParaRPr>
-                    </a:p>
-                  </a:txBody>
-                  <a:tcPr marL="6191" marR="6191" marT="6191" marB="0" anchor="b">
-                    <a:solidFill>
-                      <a:schemeClr val="accent6"/>
-                    </a:solidFill>
-                  </a:tcPr>
-                </a:tc>
-                <a:tc>
-                  <a:txBody>
-                    <a:bodyPr/>
-                    <a:lstStyle/>
-                    <a:p>
-                      <a:endParaRPr sz="900" dirty="0">
-                        <a:latin typeface="Pretendard" panose="02000503000000020004" pitchFamily="2" charset="-127"/>
-                        <a:ea typeface="Pretendard" panose="02000503000000020004" pitchFamily="2" charset="-127"/>
-                        <a:cs typeface="Pretendard" panose="02000503000000020004" pitchFamily="2" charset="-127"/>
-                      </a:endParaRPr>
-                    </a:p>
-                  </a:txBody>
-                  <a:tcPr marL="6191" marR="6191" marT="6191" marB="0" anchor="b">
-                    <a:solidFill>
-                      <a:schemeClr val="accent6"/>
-                    </a:solidFill>
-                  </a:tcPr>
-                </a:tc>
-                <a:extLst>
-                  <a:ext uri="{0D108BD9-81ED-4DB2-BD59-A6C34878D82A}">
-                    <a16:rowId xmlns:a16="http://schemas.microsoft.com/office/drawing/2014/main" val="926797788"/>
-                  </a:ext>
-                </a:extLst>
-              </a:tr>
-              <a:tr h="160973">
-                <a:tc>
-                  <a:txBody>
-                    <a:bodyPr/>
-                    <a:lstStyle/>
-                    <a:p>
-                      <a:endParaRPr sz="900" dirty="0">
-                        <a:latin typeface="Pretendard" panose="02000503000000020004" pitchFamily="2" charset="-127"/>
-                        <a:ea typeface="Pretendard" panose="02000503000000020004" pitchFamily="2" charset="-127"/>
-                        <a:cs typeface="Pretendard" panose="02000503000000020004" pitchFamily="2" charset="-127"/>
-                      </a:endParaRPr>
-                    </a:p>
-                  </a:txBody>
-                  <a:tcPr marL="6191" marR="6191" marT="6191" marB="0" anchor="b">
-                    <a:solidFill>
-                      <a:schemeClr val="accent6"/>
-                    </a:solidFill>
-                  </a:tcPr>
-                </a:tc>
-                <a:tc>
-                  <a:txBody>
-                    <a:bodyPr/>
-                    <a:lstStyle/>
-                    <a:p>
-                      <a:endParaRPr sz="900" dirty="0">
-                        <a:latin typeface="Pretendard" panose="02000503000000020004" pitchFamily="2" charset="-127"/>
-                        <a:ea typeface="Pretendard" panose="02000503000000020004" pitchFamily="2" charset="-127"/>
-                        <a:cs typeface="Pretendard" panose="02000503000000020004" pitchFamily="2" charset="-127"/>
-                      </a:endParaRPr>
-                    </a:p>
-                  </a:txBody>
-                  <a:tcPr marL="6191" marR="6191" marT="6191" marB="0" anchor="b">
-                    <a:solidFill>
-                      <a:schemeClr val="accent6"/>
-                    </a:solidFill>
-                  </a:tcPr>
-                </a:tc>
-                <a:extLst>
-                  <a:ext uri="{0D108BD9-81ED-4DB2-BD59-A6C34878D82A}">
-                    <a16:rowId xmlns:a16="http://schemas.microsoft.com/office/drawing/2014/main" val="1930534886"/>
-                  </a:ext>
-                </a:extLst>
-              </a:tr>
-              <a:tr h="160973">
-                <a:tc>
-                  <a:txBody>
-                    <a:bodyPr/>
-                    <a:lstStyle/>
-                    <a:p>
-                      <a:endParaRPr sz="900" dirty="0">
-                        <a:latin typeface="Pretendard" panose="02000503000000020004" pitchFamily="2" charset="-127"/>
-                        <a:ea typeface="Pretendard" panose="02000503000000020004" pitchFamily="2" charset="-127"/>
-                        <a:cs typeface="Pretendard" panose="02000503000000020004" pitchFamily="2" charset="-127"/>
-                      </a:endParaRPr>
-                    </a:p>
-                  </a:txBody>
-                  <a:tcPr marL="6191" marR="6191" marT="6191" marB="0" anchor="b">
-                    <a:solidFill>
-                      <a:schemeClr val="accent6"/>
-                    </a:solidFill>
-                  </a:tcPr>
-                </a:tc>
-                <a:tc>
-                  <a:txBody>
-                    <a:bodyPr/>
-                    <a:lstStyle/>
-                    <a:p>
-                      <a:endParaRPr sz="900" dirty="0">
-                        <a:latin typeface="Pretendard" panose="02000503000000020004" pitchFamily="2" charset="-127"/>
-                        <a:ea typeface="Pretendard" panose="02000503000000020004" pitchFamily="2" charset="-127"/>
-                        <a:cs typeface="Pretendard" panose="02000503000000020004" pitchFamily="2" charset="-127"/>
-                      </a:endParaRPr>
-                    </a:p>
-                  </a:txBody>
-                  <a:tcPr marL="6191" marR="6191" marT="6191" marB="0" anchor="b">
-                    <a:solidFill>
-                      <a:schemeClr val="accent6"/>
-                    </a:solidFill>
-                  </a:tcPr>
-                </a:tc>
-                <a:extLst>
-                  <a:ext uri="{0D108BD9-81ED-4DB2-BD59-A6C34878D82A}">
-                    <a16:rowId xmlns:a16="http://schemas.microsoft.com/office/drawing/2014/main" val="1186525500"/>
-                  </a:ext>
-                </a:extLst>
-              </a:tr>
-              <a:tr h="160973">
-                <a:tc>
-                  <a:txBody>
-                    <a:bodyPr/>
-                    <a:lstStyle/>
-                    <a:p>
-                      <a:endParaRPr sz="900">
-                        <a:latin typeface="Pretendard" panose="02000503000000020004" pitchFamily="2" charset="-127"/>
-                        <a:ea typeface="Pretendard" panose="02000503000000020004" pitchFamily="2" charset="-127"/>
-                        <a:cs typeface="Pretendard" panose="02000503000000020004" pitchFamily="2" charset="-127"/>
-                      </a:endParaRPr>
-                    </a:p>
-                  </a:txBody>
-                  <a:tcPr marL="6191" marR="6191" marT="6191" marB="0" anchor="b">
-                    <a:solidFill>
-                      <a:schemeClr val="accent6"/>
-                    </a:solidFill>
-                  </a:tcPr>
-                </a:tc>
-                <a:tc>
-                  <a:txBody>
-                    <a:bodyPr/>
-                    <a:lstStyle/>
-                    <a:p>
-                      <a:endParaRPr sz="900" dirty="0">
-                        <a:latin typeface="Pretendard" panose="02000503000000020004" pitchFamily="2" charset="-127"/>
-                        <a:ea typeface="Pretendard" panose="02000503000000020004" pitchFamily="2" charset="-127"/>
-                        <a:cs typeface="Pretendard" panose="02000503000000020004" pitchFamily="2" charset="-127"/>
-                      </a:endParaRPr>
-                    </a:p>
-                  </a:txBody>
-                  <a:tcPr marL="6191" marR="6191" marT="6191" marB="0" anchor="b">
-                    <a:solidFill>
-                      <a:schemeClr val="accent6"/>
-                    </a:solidFill>
-                  </a:tcPr>
-                </a:tc>
-                <a:extLst>
-                  <a:ext uri="{0D108BD9-81ED-4DB2-BD59-A6C34878D82A}">
-                    <a16:rowId xmlns:a16="http://schemas.microsoft.com/office/drawing/2014/main" val="871243760"/>
-                  </a:ext>
-                </a:extLst>
-              </a:tr>
-            </a:tbl>
-          </a:graphicData>
-        </a:graphic>
-      </p:graphicFrame>
     </p:spTree>
     <p:extLst>
       <p:ext uri="{BB962C8B-B14F-4D97-AF65-F5344CB8AC3E}">

--- a/template.pptx.pptx
+++ b/template.pptx.pptx
@@ -9,7 +9,7 @@
   </p:notesMasterIdLst>
   <p:sldIdLst>
     <p:sldId id="11518" r:id="rId2"/>
-    <p:sldId id="11519" r:id="rId3"/>
+    <p:sldId id="11520" r:id="rId3"/>
   </p:sldIdLst>
   <p:sldSz cx="12192000" cy="6858000"/>
   <p:notesSz cx="6797675" cy="9926638"/>
@@ -114,7 +114,7 @@
         <p14:section name="리더십 영향력 진단" id="{36EF8F81-4E80-4DF0-895E-8453566FB0F8}">
           <p14:sldIdLst>
             <p14:sldId id="11518"/>
-            <p14:sldId id="11519"/>
+            <p14:sldId id="11520"/>
           </p14:sldIdLst>
         </p14:section>
       </p14:sectionLst>
@@ -5789,20 +5789,6 @@
               <a:defRPr/>
             </a:pPr>
             <a:r>
-              <a:rPr lang="en-US" altLang="ko-KR" b="1" dirty="0" err="1">
-                <a:solidFill>
-                  <a:schemeClr val="tx1">
-                    <a:lumMod val="65000"/>
-                    <a:lumOff val="35000"/>
-                  </a:schemeClr>
-                </a:solidFill>
-                <a:latin typeface="Arial" panose="020B0604020202020204" pitchFamily="34" charset="0"/>
-                <a:ea typeface="KoPub돋움체 Bold" panose="02020603020101020101" pitchFamily="18" charset="-127"/>
-                <a:cs typeface="Arial" panose="020B0604020202020204" pitchFamily="34" charset="0"/>
-              </a:rPr>
-              <a:t>CLiCK</a:t>
-            </a:r>
-            <a:r>
               <a:rPr lang="en-US" altLang="ko-KR" b="1" dirty="0">
                 <a:solidFill>
                   <a:schemeClr val="tx1">
@@ -5814,7 +5800,7 @@
                 <a:ea typeface="KoPub돋움체 Bold" panose="02020603020101020101" pitchFamily="18" charset="-127"/>
                 <a:cs typeface="Arial" panose="020B0604020202020204" pitchFamily="34" charset="0"/>
               </a:rPr>
-              <a:t> IAM MICRO _ Competency Analysis</a:t>
+              <a:t>CIAM _ </a:t>
             </a:r>
             <a:r>
               <a:rPr lang="ko-KR" altLang="en-US" b="1" dirty="0">
@@ -5828,35 +5814,7 @@
                 <a:ea typeface="KoPub돋움체 Bold" panose="02020603020101020101" pitchFamily="18" charset="-127"/>
                 <a:cs typeface="Arial" panose="020B0604020202020204" pitchFamily="34" charset="0"/>
               </a:rPr>
-              <a:t> </a:t>
-            </a:r>
-            <a:r>
-              <a:rPr lang="en-US" altLang="ko-KR" b="1" dirty="0">
-                <a:solidFill>
-                  <a:schemeClr val="tx1">
-                    <a:lumMod val="65000"/>
-                    <a:lumOff val="35000"/>
-                  </a:schemeClr>
-                </a:solidFill>
-                <a:latin typeface="Arial" panose="020B0604020202020204" pitchFamily="34" charset="0"/>
-                <a:ea typeface="KoPub돋움체 Bold" panose="02020603020101020101" pitchFamily="18" charset="-127"/>
-                <a:cs typeface="Arial" panose="020B0604020202020204" pitchFamily="34" charset="0"/>
-              </a:rPr>
-              <a:t>_</a:t>
-            </a:r>
-            <a:r>
-              <a:rPr lang="ko-KR" altLang="en-US" b="1" dirty="0">
-                <a:solidFill>
-                  <a:schemeClr val="tx1">
-                    <a:lumMod val="65000"/>
-                    <a:lumOff val="35000"/>
-                  </a:schemeClr>
-                </a:solidFill>
-                <a:latin typeface="Arial" panose="020B0604020202020204" pitchFamily="34" charset="0"/>
-                <a:ea typeface="KoPub돋움체 Bold" panose="02020603020101020101" pitchFamily="18" charset="-127"/>
-                <a:cs typeface="Arial" panose="020B0604020202020204" pitchFamily="34" charset="0"/>
-              </a:rPr>
-              <a:t> 리더십 영향력 진단</a:t>
+              <a:t>리더십 영향력 진단</a:t>
             </a:r>
             <a:r>
               <a:rPr lang="en-US" altLang="ko-KR" b="1" dirty="0">
@@ -6899,7 +6857,7 @@
         <p:cNvPr id="1" name="">
           <a:extLst>
             <a:ext uri="{FF2B5EF4-FFF2-40B4-BE49-F238E27FC236}">
-              <a16:creationId xmlns:a16="http://schemas.microsoft.com/office/drawing/2014/main" id="{263924C4-D97F-0FCB-6159-E3E69148B2C7}"/>
+              <a16:creationId xmlns:a16="http://schemas.microsoft.com/office/drawing/2014/main" id="{64EB9965-1084-05E2-C3C3-ACC198C820F3}"/>
             </a:ext>
           </a:extLst>
         </p:cNvPr>
@@ -6919,7 +6877,7 @@
           <p:cNvPr id="55" name="화살표: 오른쪽 54">
             <a:extLst>
               <a:ext uri="{FF2B5EF4-FFF2-40B4-BE49-F238E27FC236}">
-                <a16:creationId xmlns:a16="http://schemas.microsoft.com/office/drawing/2014/main" id="{50CBCE63-26BC-4CEC-0F9F-FDB1E29C498C}"/>
+                <a16:creationId xmlns:a16="http://schemas.microsoft.com/office/drawing/2014/main" id="{D9F82594-E4D3-C76E-D04A-D3A6EA443F43}"/>
               </a:ext>
             </a:extLst>
           </p:cNvPr>
@@ -6976,7 +6934,7 @@
           <p:cNvPr id="4" name="직선 연결선 3">
             <a:extLst>
               <a:ext uri="{FF2B5EF4-FFF2-40B4-BE49-F238E27FC236}">
-                <a16:creationId xmlns:a16="http://schemas.microsoft.com/office/drawing/2014/main" id="{982F79B1-5989-5375-AD78-9299401C1967}"/>
+                <a16:creationId xmlns:a16="http://schemas.microsoft.com/office/drawing/2014/main" id="{C2B84281-1E55-8249-DE93-59360B166788}"/>
               </a:ext>
             </a:extLst>
           </p:cNvPr>
@@ -7016,12 +6974,92 @@
           </a:fontRef>
         </p:style>
       </p:cxnSp>
+      <p:sp>
+        <p:nvSpPr>
+          <p:cNvPr id="7" name="TextBox 6">
+            <a:extLst>
+              <a:ext uri="{FF2B5EF4-FFF2-40B4-BE49-F238E27FC236}">
+                <a16:creationId xmlns:a16="http://schemas.microsoft.com/office/drawing/2014/main" id="{19023F68-C702-06D9-2F8C-ABC291F4E8A1}"/>
+              </a:ext>
+            </a:extLst>
+          </p:cNvPr>
+          <p:cNvSpPr txBox="1"/>
+          <p:nvPr/>
+        </p:nvSpPr>
+        <p:spPr>
+          <a:xfrm>
+            <a:off x="310895" y="504183"/>
+            <a:ext cx="8160005" cy="381579"/>
+          </a:xfrm>
+          <a:prstGeom prst="rect">
+            <a:avLst/>
+          </a:prstGeom>
+          <a:noFill/>
+        </p:spPr>
+        <p:txBody>
+          <a:bodyPr wrap="square">
+            <a:spAutoFit/>
+          </a:bodyPr>
+          <a:lstStyle/>
+          <a:p>
+            <a:pPr>
+              <a:lnSpc>
+                <a:spcPct val="110000"/>
+              </a:lnSpc>
+              <a:defRPr/>
+            </a:pPr>
+            <a:r>
+              <a:rPr lang="en-US" altLang="ko-KR" b="1" dirty="0">
+                <a:solidFill>
+                  <a:schemeClr val="tx1">
+                    <a:lumMod val="65000"/>
+                    <a:lumOff val="35000"/>
+                  </a:schemeClr>
+                </a:solidFill>
+                <a:latin typeface="Arial" panose="020B0604020202020204" pitchFamily="34" charset="0"/>
+                <a:ea typeface="KoPub돋움체 Bold" panose="02020603020101020101" pitchFamily="18" charset="-127"/>
+                <a:cs typeface="Arial" panose="020B0604020202020204" pitchFamily="34" charset="0"/>
+              </a:rPr>
+              <a:t>CIAM _ </a:t>
+            </a:r>
+            <a:r>
+              <a:rPr lang="ko-KR" altLang="en-US" b="1" dirty="0">
+                <a:solidFill>
+                  <a:schemeClr val="tx1">
+                    <a:lumMod val="65000"/>
+                    <a:lumOff val="35000"/>
+                  </a:schemeClr>
+                </a:solidFill>
+                <a:latin typeface="Arial" panose="020B0604020202020204" pitchFamily="34" charset="0"/>
+                <a:ea typeface="KoPub돋움체 Bold" panose="02020603020101020101" pitchFamily="18" charset="-127"/>
+                <a:cs typeface="Arial" panose="020B0604020202020204" pitchFamily="34" charset="0"/>
+              </a:rPr>
+              <a:t>리더십 영향력 진단</a:t>
+            </a:r>
+            <a:r>
+              <a:rPr lang="en-US" altLang="ko-KR" b="1" dirty="0">
+                <a:solidFill>
+                  <a:schemeClr val="tx1">
+                    <a:lumMod val="65000"/>
+                    <a:lumOff val="35000"/>
+                  </a:schemeClr>
+                </a:solidFill>
+                <a:latin typeface="Arial" panose="020B0604020202020204" pitchFamily="34" charset="0"/>
+                <a:ea typeface="KoPub돋움체 Bold" panose="02020603020101020101" pitchFamily="18" charset="-127"/>
+                <a:cs typeface="Arial" panose="020B0604020202020204" pitchFamily="34" charset="0"/>
+              </a:rPr>
+              <a:t> _ {{NAME}}</a:t>
+            </a:r>
+            <a:endParaRPr lang="ko-KR" altLang="en-US" dirty="0"/>
+          </a:p>
+        </p:txBody>
+      </p:sp>
       <p:pic>
         <p:nvPicPr>
           <p:cNvPr id="11" name="circle1">
             <a:extLst>
               <a:ext uri="{FF2B5EF4-FFF2-40B4-BE49-F238E27FC236}">
-                <a16:creationId xmlns:a16="http://schemas.microsoft.com/office/drawing/2014/main" id="{B69479EA-AF1B-2D3C-A0B6-06FAC46D4D9C}"/>
+                <a16:creationId xmlns:a16="http://schemas.microsoft.com/office/drawing/2014/main" id="{1312826E-920F-9037-6901-3EC1FA57EBF0}"/>
               </a:ext>
             </a:extLst>
           </p:cNvPr>
@@ -7081,7 +7119,7 @@
           <p:cNvPr id="16" name="chart_phase">
             <a:extLst>
               <a:ext uri="{FF2B5EF4-FFF2-40B4-BE49-F238E27FC236}">
-                <a16:creationId xmlns:a16="http://schemas.microsoft.com/office/drawing/2014/main" id="{A817EE17-3FF6-84B0-2D1E-8B7B43BA609C}"/>
+                <a16:creationId xmlns:a16="http://schemas.microsoft.com/office/drawing/2014/main" id="{5AB2F1FA-5DB2-CBB5-1F27-66A6AB33F705}"/>
               </a:ext>
             </a:extLst>
           </p:cNvPr>
@@ -7103,7 +7141,7 @@
           <p:cNvPr id="25" name="사각형: 둥근 모서리 24">
             <a:extLst>
               <a:ext uri="{FF2B5EF4-FFF2-40B4-BE49-F238E27FC236}">
-                <a16:creationId xmlns:a16="http://schemas.microsoft.com/office/drawing/2014/main" id="{B7206BCB-1E2E-8406-7952-5E0B1C11E191}"/>
+                <a16:creationId xmlns:a16="http://schemas.microsoft.com/office/drawing/2014/main" id="{E4F97440-7910-FE37-A455-3BD02BDA483D}"/>
               </a:ext>
             </a:extLst>
           </p:cNvPr>
@@ -7177,7 +7215,7 @@
           <p:cNvPr id="2" name="circle2">
             <a:extLst>
               <a:ext uri="{FF2B5EF4-FFF2-40B4-BE49-F238E27FC236}">
-                <a16:creationId xmlns:a16="http://schemas.microsoft.com/office/drawing/2014/main" id="{F4A57BCD-AF8F-B184-49AB-2A7F3B480D64}"/>
+                <a16:creationId xmlns:a16="http://schemas.microsoft.com/office/drawing/2014/main" id="{C8DC908D-1E7F-DCD7-0097-3BDBE4BDBD6B}"/>
               </a:ext>
             </a:extLst>
           </p:cNvPr>
@@ -7237,7 +7275,7 @@
           <p:cNvPr id="14" name="직사각형 13">
             <a:extLst>
               <a:ext uri="{FF2B5EF4-FFF2-40B4-BE49-F238E27FC236}">
-                <a16:creationId xmlns:a16="http://schemas.microsoft.com/office/drawing/2014/main" id="{268636F9-A6EC-B7A4-E4E8-E325B8D8F2FE}"/>
+                <a16:creationId xmlns:a16="http://schemas.microsoft.com/office/drawing/2014/main" id="{4292CCD0-5590-13EE-82CD-BFCA4EE3F574}"/>
               </a:ext>
             </a:extLst>
           </p:cNvPr>
@@ -7295,7 +7333,7 @@
           <p:cNvPr id="15" name="직사각형 14">
             <a:extLst>
               <a:ext uri="{FF2B5EF4-FFF2-40B4-BE49-F238E27FC236}">
-                <a16:creationId xmlns:a16="http://schemas.microsoft.com/office/drawing/2014/main" id="{4F5E4FBC-46E5-A040-78BC-1906B3D923B0}"/>
+                <a16:creationId xmlns:a16="http://schemas.microsoft.com/office/drawing/2014/main" id="{15688AF0-81ED-55C8-9FE3-C9DEA0DFECF9}"/>
               </a:ext>
             </a:extLst>
           </p:cNvPr>
@@ -7351,7 +7389,7 @@
           <p:cNvPr id="17" name="직선 연결선 16">
             <a:extLst>
               <a:ext uri="{FF2B5EF4-FFF2-40B4-BE49-F238E27FC236}">
-                <a16:creationId xmlns:a16="http://schemas.microsoft.com/office/drawing/2014/main" id="{E27E5A9A-7408-25AE-5E5D-82B381B0C523}"/>
+                <a16:creationId xmlns:a16="http://schemas.microsoft.com/office/drawing/2014/main" id="{198773C7-F392-ABF9-8582-B2B371EFB67E}"/>
               </a:ext>
             </a:extLst>
           </p:cNvPr>
@@ -7396,7 +7434,7 @@
           <p:cNvPr id="18" name="사각형: 둥근 모서리 17">
             <a:extLst>
               <a:ext uri="{FF2B5EF4-FFF2-40B4-BE49-F238E27FC236}">
-                <a16:creationId xmlns:a16="http://schemas.microsoft.com/office/drawing/2014/main" id="{4FBD8B46-DBD2-5A70-E8E9-79DC6B20CAF8}"/>
+                <a16:creationId xmlns:a16="http://schemas.microsoft.com/office/drawing/2014/main" id="{9522769C-CA8A-6025-420E-D3F61A317602}"/>
               </a:ext>
             </a:extLst>
           </p:cNvPr>
@@ -7488,7 +7526,7 @@
           <p:cNvPr id="19" name="사각형: 둥근 모서리 18">
             <a:extLst>
               <a:ext uri="{FF2B5EF4-FFF2-40B4-BE49-F238E27FC236}">
-                <a16:creationId xmlns:a16="http://schemas.microsoft.com/office/drawing/2014/main" id="{85723E9A-7D43-367B-AA2A-EDB1C597882B}"/>
+                <a16:creationId xmlns:a16="http://schemas.microsoft.com/office/drawing/2014/main" id="{13D6617A-8326-04C1-74BD-8917E9D324F7}"/>
               </a:ext>
             </a:extLst>
           </p:cNvPr>
@@ -7580,7 +7618,7 @@
           <p:cNvPr id="20" name="직선 화살표 연결선 19">
             <a:extLst>
               <a:ext uri="{FF2B5EF4-FFF2-40B4-BE49-F238E27FC236}">
-                <a16:creationId xmlns:a16="http://schemas.microsoft.com/office/drawing/2014/main" id="{FB7E182E-5047-EDDF-B325-174D3B7DAEAA}"/>
+                <a16:creationId xmlns:a16="http://schemas.microsoft.com/office/drawing/2014/main" id="{ED557B8D-14BB-1185-B884-5AC7F3688D19}"/>
               </a:ext>
             </a:extLst>
           </p:cNvPr>
@@ -7620,7 +7658,7 @@
           <p:cNvPr id="21" name="직선 화살표 연결선 20">
             <a:extLst>
               <a:ext uri="{FF2B5EF4-FFF2-40B4-BE49-F238E27FC236}">
-                <a16:creationId xmlns:a16="http://schemas.microsoft.com/office/drawing/2014/main" id="{5DDA1C22-6CD3-9671-0A5D-D4477372CCB6}"/>
+                <a16:creationId xmlns:a16="http://schemas.microsoft.com/office/drawing/2014/main" id="{4D233FC7-F484-0C81-DA3B-46A1BEBF82A4}"/>
               </a:ext>
             </a:extLst>
           </p:cNvPr>
@@ -7662,7 +7700,7 @@
           <p:cNvPr id="22" name="chart_strategy">
             <a:extLst>
               <a:ext uri="{FF2B5EF4-FFF2-40B4-BE49-F238E27FC236}">
-                <a16:creationId xmlns:a16="http://schemas.microsoft.com/office/drawing/2014/main" id="{F85F7525-9E19-545D-8F95-98DA3D45D298}"/>
+                <a16:creationId xmlns:a16="http://schemas.microsoft.com/office/drawing/2014/main" id="{1C3D907B-815E-204D-DD1C-AB6910B0C25A}"/>
               </a:ext>
             </a:extLst>
           </p:cNvPr>
@@ -7684,7 +7722,7 @@
           <p:cNvPr id="24" name="circle5">
             <a:extLst>
               <a:ext uri="{FF2B5EF4-FFF2-40B4-BE49-F238E27FC236}">
-                <a16:creationId xmlns:a16="http://schemas.microsoft.com/office/drawing/2014/main" id="{63ABE881-363F-5574-6D1A-5703A152FAA0}"/>
+                <a16:creationId xmlns:a16="http://schemas.microsoft.com/office/drawing/2014/main" id="{44555AF4-25DD-200F-1D14-5D88E20289CF}"/>
               </a:ext>
             </a:extLst>
           </p:cNvPr>
@@ -7744,7 +7782,7 @@
           <p:cNvPr id="26" name="circle3">
             <a:extLst>
               <a:ext uri="{FF2B5EF4-FFF2-40B4-BE49-F238E27FC236}">
-                <a16:creationId xmlns:a16="http://schemas.microsoft.com/office/drawing/2014/main" id="{69B39673-2A53-8F76-145B-FE1FD9AAA9A4}"/>
+                <a16:creationId xmlns:a16="http://schemas.microsoft.com/office/drawing/2014/main" id="{A743C183-8B0E-E48D-952C-23AEA38DDC0D}"/>
               </a:ext>
             </a:extLst>
           </p:cNvPr>
@@ -7804,7 +7842,7 @@
           <p:cNvPr id="28" name="TextBox 27">
             <a:extLst>
               <a:ext uri="{FF2B5EF4-FFF2-40B4-BE49-F238E27FC236}">
-                <a16:creationId xmlns:a16="http://schemas.microsoft.com/office/drawing/2014/main" id="{A56DE35A-159E-D1D9-EF91-406BE649DE48}"/>
+                <a16:creationId xmlns:a16="http://schemas.microsoft.com/office/drawing/2014/main" id="{F1E86E5E-787C-95CD-5452-EDC27BB99BC5}"/>
               </a:ext>
             </a:extLst>
           </p:cNvPr>
@@ -7877,7 +7915,7 @@
           <p:cNvPr id="29" name="사각형: 둥근 모서리 28">
             <a:extLst>
               <a:ext uri="{FF2B5EF4-FFF2-40B4-BE49-F238E27FC236}">
-                <a16:creationId xmlns:a16="http://schemas.microsoft.com/office/drawing/2014/main" id="{BCE2B581-BCE1-DC28-55EF-DC0B82CF1E54}"/>
+                <a16:creationId xmlns:a16="http://schemas.microsoft.com/office/drawing/2014/main" id="{0F196D6A-3AB0-D6B4-355E-A4F403736123}"/>
               </a:ext>
             </a:extLst>
           </p:cNvPr>
@@ -7951,7 +7989,7 @@
           <p:cNvPr id="3" name="circle4">
             <a:extLst>
               <a:ext uri="{FF2B5EF4-FFF2-40B4-BE49-F238E27FC236}">
-                <a16:creationId xmlns:a16="http://schemas.microsoft.com/office/drawing/2014/main" id="{E893F35E-236E-E11A-368C-1BB23272DD6A}"/>
+                <a16:creationId xmlns:a16="http://schemas.microsoft.com/office/drawing/2014/main" id="{F8E54F9B-CC45-D3D8-275A-67CB29A8F26C}"/>
               </a:ext>
             </a:extLst>
           </p:cNvPr>
@@ -8006,132 +8044,10 @@
           </a:extLst>
         </p:spPr>
       </p:pic>
-      <p:sp>
-        <p:nvSpPr>
-          <p:cNvPr id="5" name="TextBox 4">
-            <a:extLst>
-              <a:ext uri="{FF2B5EF4-FFF2-40B4-BE49-F238E27FC236}">
-                <a16:creationId xmlns:a16="http://schemas.microsoft.com/office/drawing/2014/main" id="{A8C21A72-E2F3-DFD5-BAAB-31F44D40A4D9}"/>
-              </a:ext>
-            </a:extLst>
-          </p:cNvPr>
-          <p:cNvSpPr txBox="1"/>
-          <p:nvPr/>
-        </p:nvSpPr>
-        <p:spPr>
-          <a:xfrm>
-            <a:off x="310895" y="504183"/>
-            <a:ext cx="8160005" cy="381579"/>
-          </a:xfrm>
-          <a:prstGeom prst="rect">
-            <a:avLst/>
-          </a:prstGeom>
-          <a:noFill/>
-        </p:spPr>
-        <p:txBody>
-          <a:bodyPr wrap="square">
-            <a:spAutoFit/>
-          </a:bodyPr>
-          <a:lstStyle/>
-          <a:p>
-            <a:pPr>
-              <a:lnSpc>
-                <a:spcPct val="110000"/>
-              </a:lnSpc>
-              <a:defRPr/>
-            </a:pPr>
-            <a:r>
-              <a:rPr lang="en-US" altLang="ko-KR" b="1" dirty="0" err="1">
-                <a:solidFill>
-                  <a:schemeClr val="tx1">
-                    <a:lumMod val="65000"/>
-                    <a:lumOff val="35000"/>
-                  </a:schemeClr>
-                </a:solidFill>
-                <a:latin typeface="Arial" panose="020B0604020202020204" pitchFamily="34" charset="0"/>
-                <a:ea typeface="KoPub돋움체 Bold" panose="02020603020101020101" pitchFamily="18" charset="-127"/>
-                <a:cs typeface="Arial" panose="020B0604020202020204" pitchFamily="34" charset="0"/>
-              </a:rPr>
-              <a:t>CLiCK</a:t>
-            </a:r>
-            <a:r>
-              <a:rPr lang="en-US" altLang="ko-KR" b="1" dirty="0">
-                <a:solidFill>
-                  <a:schemeClr val="tx1">
-                    <a:lumMod val="65000"/>
-                    <a:lumOff val="35000"/>
-                  </a:schemeClr>
-                </a:solidFill>
-                <a:latin typeface="Arial" panose="020B0604020202020204" pitchFamily="34" charset="0"/>
-                <a:ea typeface="KoPub돋움체 Bold" panose="02020603020101020101" pitchFamily="18" charset="-127"/>
-                <a:cs typeface="Arial" panose="020B0604020202020204" pitchFamily="34" charset="0"/>
-              </a:rPr>
-              <a:t> IAM MICRO _ Competency Analysis</a:t>
-            </a:r>
-            <a:r>
-              <a:rPr lang="ko-KR" altLang="en-US" b="1" dirty="0">
-                <a:solidFill>
-                  <a:schemeClr val="tx1">
-                    <a:lumMod val="65000"/>
-                    <a:lumOff val="35000"/>
-                  </a:schemeClr>
-                </a:solidFill>
-                <a:latin typeface="Arial" panose="020B0604020202020204" pitchFamily="34" charset="0"/>
-                <a:ea typeface="KoPub돋움체 Bold" panose="02020603020101020101" pitchFamily="18" charset="-127"/>
-                <a:cs typeface="Arial" panose="020B0604020202020204" pitchFamily="34" charset="0"/>
-              </a:rPr>
-              <a:t> </a:t>
-            </a:r>
-            <a:r>
-              <a:rPr lang="en-US" altLang="ko-KR" b="1" dirty="0">
-                <a:solidFill>
-                  <a:schemeClr val="tx1">
-                    <a:lumMod val="65000"/>
-                    <a:lumOff val="35000"/>
-                  </a:schemeClr>
-                </a:solidFill>
-                <a:latin typeface="Arial" panose="020B0604020202020204" pitchFamily="34" charset="0"/>
-                <a:ea typeface="KoPub돋움체 Bold" panose="02020603020101020101" pitchFamily="18" charset="-127"/>
-                <a:cs typeface="Arial" panose="020B0604020202020204" pitchFamily="34" charset="0"/>
-              </a:rPr>
-              <a:t>_</a:t>
-            </a:r>
-            <a:r>
-              <a:rPr lang="ko-KR" altLang="en-US" b="1" dirty="0">
-                <a:solidFill>
-                  <a:schemeClr val="tx1">
-                    <a:lumMod val="65000"/>
-                    <a:lumOff val="35000"/>
-                  </a:schemeClr>
-                </a:solidFill>
-                <a:latin typeface="Arial" panose="020B0604020202020204" pitchFamily="34" charset="0"/>
-                <a:ea typeface="KoPub돋움체 Bold" panose="02020603020101020101" pitchFamily="18" charset="-127"/>
-                <a:cs typeface="Arial" panose="020B0604020202020204" pitchFamily="34" charset="0"/>
-              </a:rPr>
-              <a:t> 리더십 영향력 진단</a:t>
-            </a:r>
-            <a:r>
-              <a:rPr lang="en-US" altLang="ko-KR" b="1" dirty="0">
-                <a:solidFill>
-                  <a:schemeClr val="tx1">
-                    <a:lumMod val="65000"/>
-                    <a:lumOff val="35000"/>
-                  </a:schemeClr>
-                </a:solidFill>
-                <a:latin typeface="Arial" panose="020B0604020202020204" pitchFamily="34" charset="0"/>
-                <a:ea typeface="KoPub돋움체 Bold" panose="02020603020101020101" pitchFamily="18" charset="-127"/>
-                <a:cs typeface="Arial" panose="020B0604020202020204" pitchFamily="34" charset="0"/>
-              </a:rPr>
-              <a:t> _ {{NAME}}</a:t>
-            </a:r>
-            <a:endParaRPr lang="ko-KR" altLang="en-US" dirty="0"/>
-          </a:p>
-        </p:txBody>
-      </p:sp>
     </p:spTree>
     <p:extLst>
       <p:ext uri="{BB962C8B-B14F-4D97-AF65-F5344CB8AC3E}">
-        <p14:creationId xmlns:p14="http://schemas.microsoft.com/office/powerpoint/2010/main" val="2198681309"/>
+        <p14:creationId xmlns:p14="http://schemas.microsoft.com/office/powerpoint/2010/main" val="2650095268"/>
       </p:ext>
     </p:extLst>
   </p:cSld>

--- a/template.pptx.pptx
+++ b/template.pptx.pptx
@@ -9,7 +9,7 @@
   </p:notesMasterIdLst>
   <p:sldIdLst>
     <p:sldId id="11518" r:id="rId2"/>
-    <p:sldId id="11520" r:id="rId3"/>
+    <p:sldId id="11521" r:id="rId3"/>
   </p:sldIdLst>
   <p:sldSz cx="12192000" cy="6858000"/>
   <p:notesSz cx="6797675" cy="9926638"/>
@@ -114,7 +114,7 @@
         <p14:section name="리더십 영향력 진단" id="{36EF8F81-4E80-4DF0-895E-8453566FB0F8}">
           <p14:sldIdLst>
             <p14:sldId id="11518"/>
-            <p14:sldId id="11520"/>
+            <p14:sldId id="11521"/>
           </p14:sldIdLst>
         </p14:section>
       </p14:sectionLst>
@@ -5936,7 +5936,7 @@
         </p:nvSpPr>
         <p:spPr>
           <a:xfrm>
-            <a:off x="4850320" y="1371367"/>
+            <a:off x="4850320" y="1324232"/>
             <a:ext cx="2491359" cy="244464"/>
           </a:xfrm>
           <a:prstGeom prst="roundRect">
@@ -6857,7 +6857,7 @@
         <p:cNvPr id="1" name="">
           <a:extLst>
             <a:ext uri="{FF2B5EF4-FFF2-40B4-BE49-F238E27FC236}">
-              <a16:creationId xmlns:a16="http://schemas.microsoft.com/office/drawing/2014/main" id="{64EB9965-1084-05E2-C3C3-ACC198C820F3}"/>
+              <a16:creationId xmlns:a16="http://schemas.microsoft.com/office/drawing/2014/main" id="{512CF639-6E80-101A-0D4B-E068A94DB6E5}"/>
             </a:ext>
           </a:extLst>
         </p:cNvPr>
@@ -6877,7 +6877,7 @@
           <p:cNvPr id="55" name="화살표: 오른쪽 54">
             <a:extLst>
               <a:ext uri="{FF2B5EF4-FFF2-40B4-BE49-F238E27FC236}">
-                <a16:creationId xmlns:a16="http://schemas.microsoft.com/office/drawing/2014/main" id="{D9F82594-E4D3-C76E-D04A-D3A6EA443F43}"/>
+                <a16:creationId xmlns:a16="http://schemas.microsoft.com/office/drawing/2014/main" id="{1D43457A-439B-38AC-ABBB-66AAB429B57E}"/>
               </a:ext>
             </a:extLst>
           </p:cNvPr>
@@ -6934,7 +6934,7 @@
           <p:cNvPr id="4" name="직선 연결선 3">
             <a:extLst>
               <a:ext uri="{FF2B5EF4-FFF2-40B4-BE49-F238E27FC236}">
-                <a16:creationId xmlns:a16="http://schemas.microsoft.com/office/drawing/2014/main" id="{C2B84281-1E55-8249-DE93-59360B166788}"/>
+                <a16:creationId xmlns:a16="http://schemas.microsoft.com/office/drawing/2014/main" id="{86ABD23B-418E-729C-CCB2-24B87ACE3A9E}"/>
               </a:ext>
             </a:extLst>
           </p:cNvPr>
@@ -6979,7 +6979,7 @@
           <p:cNvPr id="7" name="TextBox 6">
             <a:extLst>
               <a:ext uri="{FF2B5EF4-FFF2-40B4-BE49-F238E27FC236}">
-                <a16:creationId xmlns:a16="http://schemas.microsoft.com/office/drawing/2014/main" id="{19023F68-C702-06D9-2F8C-ABC291F4E8A1}"/>
+                <a16:creationId xmlns:a16="http://schemas.microsoft.com/office/drawing/2014/main" id="{E25B916F-1473-0071-CDE9-42F9A4252662}"/>
               </a:ext>
             </a:extLst>
           </p:cNvPr>
@@ -7059,7 +7059,7 @@
           <p:cNvPr id="11" name="circle1">
             <a:extLst>
               <a:ext uri="{FF2B5EF4-FFF2-40B4-BE49-F238E27FC236}">
-                <a16:creationId xmlns:a16="http://schemas.microsoft.com/office/drawing/2014/main" id="{1312826E-920F-9037-6901-3EC1FA57EBF0}"/>
+                <a16:creationId xmlns:a16="http://schemas.microsoft.com/office/drawing/2014/main" id="{07395C77-5DB1-43C9-1561-387242945D9F}"/>
               </a:ext>
             </a:extLst>
           </p:cNvPr>
@@ -7119,7 +7119,7 @@
           <p:cNvPr id="16" name="chart_phase">
             <a:extLst>
               <a:ext uri="{FF2B5EF4-FFF2-40B4-BE49-F238E27FC236}">
-                <a16:creationId xmlns:a16="http://schemas.microsoft.com/office/drawing/2014/main" id="{5AB2F1FA-5DB2-CBB5-1F27-66A6AB33F705}"/>
+                <a16:creationId xmlns:a16="http://schemas.microsoft.com/office/drawing/2014/main" id="{5FA406A3-5717-A756-E263-E9A25EC12703}"/>
               </a:ext>
             </a:extLst>
           </p:cNvPr>
@@ -7141,7 +7141,7 @@
           <p:cNvPr id="25" name="사각형: 둥근 모서리 24">
             <a:extLst>
               <a:ext uri="{FF2B5EF4-FFF2-40B4-BE49-F238E27FC236}">
-                <a16:creationId xmlns:a16="http://schemas.microsoft.com/office/drawing/2014/main" id="{E4F97440-7910-FE37-A455-3BD02BDA483D}"/>
+                <a16:creationId xmlns:a16="http://schemas.microsoft.com/office/drawing/2014/main" id="{8DD4D0C0-ECE4-319E-B676-15E4D6CDA332}"/>
               </a:ext>
             </a:extLst>
           </p:cNvPr>
@@ -7150,7 +7150,7 @@
         </p:nvSpPr>
         <p:spPr>
           <a:xfrm>
-            <a:off x="4850320" y="1371367"/>
+            <a:off x="4850320" y="1324232"/>
             <a:ext cx="2491359" cy="244464"/>
           </a:xfrm>
           <a:prstGeom prst="roundRect">
@@ -7215,7 +7215,7 @@
           <p:cNvPr id="2" name="circle2">
             <a:extLst>
               <a:ext uri="{FF2B5EF4-FFF2-40B4-BE49-F238E27FC236}">
-                <a16:creationId xmlns:a16="http://schemas.microsoft.com/office/drawing/2014/main" id="{C8DC908D-1E7F-DCD7-0097-3BDBE4BDBD6B}"/>
+                <a16:creationId xmlns:a16="http://schemas.microsoft.com/office/drawing/2014/main" id="{D2F1601D-366F-6466-123C-0A5294A3A258}"/>
               </a:ext>
             </a:extLst>
           </p:cNvPr>
@@ -7275,7 +7275,7 @@
           <p:cNvPr id="14" name="직사각형 13">
             <a:extLst>
               <a:ext uri="{FF2B5EF4-FFF2-40B4-BE49-F238E27FC236}">
-                <a16:creationId xmlns:a16="http://schemas.microsoft.com/office/drawing/2014/main" id="{4292CCD0-5590-13EE-82CD-BFCA4EE3F574}"/>
+                <a16:creationId xmlns:a16="http://schemas.microsoft.com/office/drawing/2014/main" id="{103075F4-EDA1-286D-803F-18A7DCBAD9EB}"/>
               </a:ext>
             </a:extLst>
           </p:cNvPr>
@@ -7333,7 +7333,7 @@
           <p:cNvPr id="15" name="직사각형 14">
             <a:extLst>
               <a:ext uri="{FF2B5EF4-FFF2-40B4-BE49-F238E27FC236}">
-                <a16:creationId xmlns:a16="http://schemas.microsoft.com/office/drawing/2014/main" id="{15688AF0-81ED-55C8-9FE3-C9DEA0DFECF9}"/>
+                <a16:creationId xmlns:a16="http://schemas.microsoft.com/office/drawing/2014/main" id="{6246D4F6-2F91-EF10-9550-88B617E49DE7}"/>
               </a:ext>
             </a:extLst>
           </p:cNvPr>
@@ -7389,7 +7389,7 @@
           <p:cNvPr id="17" name="직선 연결선 16">
             <a:extLst>
               <a:ext uri="{FF2B5EF4-FFF2-40B4-BE49-F238E27FC236}">
-                <a16:creationId xmlns:a16="http://schemas.microsoft.com/office/drawing/2014/main" id="{198773C7-F392-ABF9-8582-B2B371EFB67E}"/>
+                <a16:creationId xmlns:a16="http://schemas.microsoft.com/office/drawing/2014/main" id="{CB9C1366-513C-0563-56B6-7425FC6741B2}"/>
               </a:ext>
             </a:extLst>
           </p:cNvPr>
@@ -7434,7 +7434,7 @@
           <p:cNvPr id="18" name="사각형: 둥근 모서리 17">
             <a:extLst>
               <a:ext uri="{FF2B5EF4-FFF2-40B4-BE49-F238E27FC236}">
-                <a16:creationId xmlns:a16="http://schemas.microsoft.com/office/drawing/2014/main" id="{9522769C-CA8A-6025-420E-D3F61A317602}"/>
+                <a16:creationId xmlns:a16="http://schemas.microsoft.com/office/drawing/2014/main" id="{0E83AFCE-3C3A-BF05-5C26-10099AA1D690}"/>
               </a:ext>
             </a:extLst>
           </p:cNvPr>
@@ -7526,7 +7526,7 @@
           <p:cNvPr id="19" name="사각형: 둥근 모서리 18">
             <a:extLst>
               <a:ext uri="{FF2B5EF4-FFF2-40B4-BE49-F238E27FC236}">
-                <a16:creationId xmlns:a16="http://schemas.microsoft.com/office/drawing/2014/main" id="{13D6617A-8326-04C1-74BD-8917E9D324F7}"/>
+                <a16:creationId xmlns:a16="http://schemas.microsoft.com/office/drawing/2014/main" id="{B17E2DBE-DCEB-D8CB-D010-F5FE60C9587F}"/>
               </a:ext>
             </a:extLst>
           </p:cNvPr>
@@ -7618,7 +7618,7 @@
           <p:cNvPr id="20" name="직선 화살표 연결선 19">
             <a:extLst>
               <a:ext uri="{FF2B5EF4-FFF2-40B4-BE49-F238E27FC236}">
-                <a16:creationId xmlns:a16="http://schemas.microsoft.com/office/drawing/2014/main" id="{ED557B8D-14BB-1185-B884-5AC7F3688D19}"/>
+                <a16:creationId xmlns:a16="http://schemas.microsoft.com/office/drawing/2014/main" id="{3BEE11A9-745B-B97E-E84E-959525FC3BA5}"/>
               </a:ext>
             </a:extLst>
           </p:cNvPr>
@@ -7658,7 +7658,7 @@
           <p:cNvPr id="21" name="직선 화살표 연결선 20">
             <a:extLst>
               <a:ext uri="{FF2B5EF4-FFF2-40B4-BE49-F238E27FC236}">
-                <a16:creationId xmlns:a16="http://schemas.microsoft.com/office/drawing/2014/main" id="{4D233FC7-F484-0C81-DA3B-46A1BEBF82A4}"/>
+                <a16:creationId xmlns:a16="http://schemas.microsoft.com/office/drawing/2014/main" id="{F6D19FC1-1EAE-1671-8BB7-64C35E66C022}"/>
               </a:ext>
             </a:extLst>
           </p:cNvPr>
@@ -7700,7 +7700,7 @@
           <p:cNvPr id="22" name="chart_strategy">
             <a:extLst>
               <a:ext uri="{FF2B5EF4-FFF2-40B4-BE49-F238E27FC236}">
-                <a16:creationId xmlns:a16="http://schemas.microsoft.com/office/drawing/2014/main" id="{1C3D907B-815E-204D-DD1C-AB6910B0C25A}"/>
+                <a16:creationId xmlns:a16="http://schemas.microsoft.com/office/drawing/2014/main" id="{DE79F0A8-3CA1-0509-71B2-CD92EFF70073}"/>
               </a:ext>
             </a:extLst>
           </p:cNvPr>
@@ -7722,7 +7722,7 @@
           <p:cNvPr id="24" name="circle5">
             <a:extLst>
               <a:ext uri="{FF2B5EF4-FFF2-40B4-BE49-F238E27FC236}">
-                <a16:creationId xmlns:a16="http://schemas.microsoft.com/office/drawing/2014/main" id="{44555AF4-25DD-200F-1D14-5D88E20289CF}"/>
+                <a16:creationId xmlns:a16="http://schemas.microsoft.com/office/drawing/2014/main" id="{BBB01498-37FE-B11E-A6FE-D012FEB928D0}"/>
               </a:ext>
             </a:extLst>
           </p:cNvPr>
@@ -7782,7 +7782,7 @@
           <p:cNvPr id="26" name="circle3">
             <a:extLst>
               <a:ext uri="{FF2B5EF4-FFF2-40B4-BE49-F238E27FC236}">
-                <a16:creationId xmlns:a16="http://schemas.microsoft.com/office/drawing/2014/main" id="{A743C183-8B0E-E48D-952C-23AEA38DDC0D}"/>
+                <a16:creationId xmlns:a16="http://schemas.microsoft.com/office/drawing/2014/main" id="{EA3B143A-9166-9501-5BB8-E43384BE4A78}"/>
               </a:ext>
             </a:extLst>
           </p:cNvPr>
@@ -7842,7 +7842,7 @@
           <p:cNvPr id="28" name="TextBox 27">
             <a:extLst>
               <a:ext uri="{FF2B5EF4-FFF2-40B4-BE49-F238E27FC236}">
-                <a16:creationId xmlns:a16="http://schemas.microsoft.com/office/drawing/2014/main" id="{F1E86E5E-787C-95CD-5452-EDC27BB99BC5}"/>
+                <a16:creationId xmlns:a16="http://schemas.microsoft.com/office/drawing/2014/main" id="{5C0D05A7-1A40-24A0-A983-7BEC1C517D2D}"/>
               </a:ext>
             </a:extLst>
           </p:cNvPr>
@@ -7915,7 +7915,7 @@
           <p:cNvPr id="29" name="사각형: 둥근 모서리 28">
             <a:extLst>
               <a:ext uri="{FF2B5EF4-FFF2-40B4-BE49-F238E27FC236}">
-                <a16:creationId xmlns:a16="http://schemas.microsoft.com/office/drawing/2014/main" id="{0F196D6A-3AB0-D6B4-355E-A4F403736123}"/>
+                <a16:creationId xmlns:a16="http://schemas.microsoft.com/office/drawing/2014/main" id="{881491CE-703F-ECEF-5FB2-53BAC12E7C75}"/>
               </a:ext>
             </a:extLst>
           </p:cNvPr>
@@ -7989,7 +7989,7 @@
           <p:cNvPr id="3" name="circle4">
             <a:extLst>
               <a:ext uri="{FF2B5EF4-FFF2-40B4-BE49-F238E27FC236}">
-                <a16:creationId xmlns:a16="http://schemas.microsoft.com/office/drawing/2014/main" id="{F8E54F9B-CC45-D3D8-275A-67CB29A8F26C}"/>
+                <a16:creationId xmlns:a16="http://schemas.microsoft.com/office/drawing/2014/main" id="{37E047D5-90DE-DC1A-634B-8148FBD1C397}"/>
               </a:ext>
             </a:extLst>
           </p:cNvPr>
@@ -8047,7 +8047,7 @@
     </p:spTree>
     <p:extLst>
       <p:ext uri="{BB962C8B-B14F-4D97-AF65-F5344CB8AC3E}">
-        <p14:creationId xmlns:p14="http://schemas.microsoft.com/office/powerpoint/2010/main" val="2650095268"/>
+        <p14:creationId xmlns:p14="http://schemas.microsoft.com/office/powerpoint/2010/main" val="173570699"/>
       </p:ext>
     </p:extLst>
   </p:cSld>

--- a/template.pptx.pptx
+++ b/template.pptx.pptx
@@ -9,7 +9,7 @@
   </p:notesMasterIdLst>
   <p:sldIdLst>
     <p:sldId id="11518" r:id="rId2"/>
-    <p:sldId id="11521" r:id="rId3"/>
+    <p:sldId id="11522" r:id="rId3"/>
   </p:sldIdLst>
   <p:sldSz cx="12192000" cy="6858000"/>
   <p:notesSz cx="6797675" cy="9926638"/>
@@ -114,7 +114,7 @@
         <p14:section name="리더십 영향력 진단" id="{36EF8F81-4E80-4DF0-895E-8453566FB0F8}">
           <p14:sldIdLst>
             <p14:sldId id="11518"/>
-            <p14:sldId id="11521"/>
+            <p14:sldId id="11522"/>
           </p14:sldIdLst>
         </p14:section>
       </p14:sectionLst>
@@ -4389,7 +4389,7 @@
           <a:p>
             <a:fld id="{7FF436C9-A2EA-456D-A843-0E5112E88CE3}" type="datetimeFigureOut">
               <a:rPr lang="ko-KR" altLang="en-US" smtClean="0"/>
-              <a:t>2026-03-19</a:t>
+              <a:t>2026-03-20</a:t>
             </a:fld>
             <a:endParaRPr lang="ko-KR" altLang="en-US"/>
           </a:p>
@@ -4765,7 +4765,7 @@
           <a:p>
             <a:fld id="{2064E3D3-B515-4C81-B19B-1140EF513BE4}" type="datetimeFigureOut">
               <a:rPr lang="ko-KR" altLang="en-US" smtClean="0"/>
-              <a:t>2026-03-19</a:t>
+              <a:t>2026-03-20</a:t>
             </a:fld>
             <a:endParaRPr lang="ko-KR" altLang="en-US"/>
           </a:p>
@@ -5834,66 +5834,6 @@
           </a:p>
         </p:txBody>
       </p:sp>
-      <p:pic>
-        <p:nvPicPr>
-          <p:cNvPr id="11" name="circle1">
-            <a:extLst>
-              <a:ext uri="{FF2B5EF4-FFF2-40B4-BE49-F238E27FC236}">
-                <a16:creationId xmlns:a16="http://schemas.microsoft.com/office/drawing/2014/main" id="{78BD61EB-1D6B-EF6F-3261-F263E6F3C460}"/>
-              </a:ext>
-            </a:extLst>
-          </p:cNvPr>
-          <p:cNvPicPr>
-            <a:picLocks noChangeArrowheads="1"/>
-          </p:cNvPicPr>
-          <p:nvPr/>
-        </p:nvPicPr>
-        <p:blipFill>
-          <a:blip r:embed="rId2">
-            <a:extLst>
-              <a:ext uri="{28A0092B-C50C-407E-A947-70E740481C1C}">
-                <a14:useLocalDpi xmlns:a14="http://schemas.microsoft.com/office/drawing/2010/main" val="0"/>
-              </a:ext>
-            </a:extLst>
-          </a:blip>
-          <a:srcRect/>
-          <a:stretch>
-            <a:fillRect/>
-          </a:stretch>
-        </p:blipFill>
-        <p:spPr bwMode="auto">
-          <a:xfrm>
-            <a:off x="8833611" y="3216154"/>
-            <a:ext cx="844983" cy="437638"/>
-          </a:xfrm>
-          <a:prstGeom prst="rect">
-            <a:avLst/>
-          </a:prstGeom>
-          <a:noFill/>
-          <a:ln>
-            <a:noFill/>
-          </a:ln>
-          <a:extLst>
-            <a:ext uri="{909E8E84-426E-40DD-AFC4-6F175D3DCCD1}">
-              <a14:hiddenFill xmlns:a14="http://schemas.microsoft.com/office/drawing/2010/main">
-                <a:solidFill>
-                  <a:srgbClr val="FFFFFF"/>
-                </a:solidFill>
-              </a14:hiddenFill>
-            </a:ext>
-            <a:ext uri="{91240B29-F687-4F45-9708-019B960494DF}">
-              <a14:hiddenLine xmlns:a14="http://schemas.microsoft.com/office/drawing/2010/main" w="12700" cap="rnd">
-                <a:solidFill>
-                  <a:srgbClr val="000000"/>
-                </a:solidFill>
-                <a:round/>
-                <a:headEnd/>
-                <a:tailEnd/>
-              </a14:hiddenLine>
-            </a:ext>
-          </a:extLst>
-        </p:spPr>
-      </p:pic>
       <p:graphicFrame>
         <p:nvGraphicFramePr>
           <p:cNvPr id="16" name="chart_phase">
@@ -5918,7 +5858,7 @@
         </p:xfrm>
         <a:graphic>
           <a:graphicData uri="http://schemas.openxmlformats.org/drawingml/2006/chart">
-            <c:chart xmlns:c="http://schemas.openxmlformats.org/drawingml/2006/chart" xmlns:r="http://schemas.openxmlformats.org/officeDocument/2006/relationships" r:id="rId3"/>
+            <c:chart xmlns:c="http://schemas.openxmlformats.org/drawingml/2006/chart" xmlns:r="http://schemas.openxmlformats.org/officeDocument/2006/relationships" r:id="rId2"/>
           </a:graphicData>
         </a:graphic>
       </p:graphicFrame>
@@ -5996,66 +5936,6 @@
           </a:p>
         </p:txBody>
       </p:sp>
-      <p:pic>
-        <p:nvPicPr>
-          <p:cNvPr id="2" name="circle2">
-            <a:extLst>
-              <a:ext uri="{FF2B5EF4-FFF2-40B4-BE49-F238E27FC236}">
-                <a16:creationId xmlns:a16="http://schemas.microsoft.com/office/drawing/2014/main" id="{A5198007-C77A-BF58-C790-A9948191397E}"/>
-              </a:ext>
-            </a:extLst>
-          </p:cNvPr>
-          <p:cNvPicPr>
-            <a:picLocks noChangeArrowheads="1"/>
-          </p:cNvPicPr>
-          <p:nvPr/>
-        </p:nvPicPr>
-        <p:blipFill>
-          <a:blip r:embed="rId2">
-            <a:extLst>
-              <a:ext uri="{28A0092B-C50C-407E-A947-70E740481C1C}">
-                <a14:useLocalDpi xmlns:a14="http://schemas.microsoft.com/office/drawing/2010/main" val="0"/>
-              </a:ext>
-            </a:extLst>
-          </a:blip>
-          <a:srcRect/>
-          <a:stretch>
-            <a:fillRect/>
-          </a:stretch>
-        </p:blipFill>
-        <p:spPr bwMode="auto">
-          <a:xfrm>
-            <a:off x="3707536" y="3213331"/>
-            <a:ext cx="1142784" cy="437638"/>
-          </a:xfrm>
-          <a:prstGeom prst="rect">
-            <a:avLst/>
-          </a:prstGeom>
-          <a:noFill/>
-          <a:ln>
-            <a:noFill/>
-          </a:ln>
-          <a:extLst>
-            <a:ext uri="{909E8E84-426E-40DD-AFC4-6F175D3DCCD1}">
-              <a14:hiddenFill xmlns:a14="http://schemas.microsoft.com/office/drawing/2010/main">
-                <a:solidFill>
-                  <a:srgbClr val="FFFFFF"/>
-                </a:solidFill>
-              </a14:hiddenFill>
-            </a:ext>
-            <a:ext uri="{91240B29-F687-4F45-9708-019B960494DF}">
-              <a14:hiddenLine xmlns:a14="http://schemas.microsoft.com/office/drawing/2010/main" w="12700" cap="rnd">
-                <a:solidFill>
-                  <a:srgbClr val="000000"/>
-                </a:solidFill>
-                <a:round/>
-                <a:headEnd/>
-                <a:tailEnd/>
-              </a14:hiddenLine>
-            </a:ext>
-          </a:extLst>
-        </p:spPr>
-      </p:pic>
       <p:sp>
         <p:nvSpPr>
           <p:cNvPr id="14" name="직사각형 13">
@@ -6505,130 +6385,10 @@
         </p:xfrm>
         <a:graphic>
           <a:graphicData uri="http://schemas.openxmlformats.org/drawingml/2006/chart">
-            <c:chart xmlns:c="http://schemas.openxmlformats.org/drawingml/2006/chart" xmlns:r="http://schemas.openxmlformats.org/officeDocument/2006/relationships" r:id="rId4"/>
+            <c:chart xmlns:c="http://schemas.openxmlformats.org/drawingml/2006/chart" xmlns:r="http://schemas.openxmlformats.org/officeDocument/2006/relationships" r:id="rId3"/>
           </a:graphicData>
         </a:graphic>
       </p:graphicFrame>
-      <p:pic>
-        <p:nvPicPr>
-          <p:cNvPr id="24" name="circle5">
-            <a:extLst>
-              <a:ext uri="{FF2B5EF4-FFF2-40B4-BE49-F238E27FC236}">
-                <a16:creationId xmlns:a16="http://schemas.microsoft.com/office/drawing/2014/main" id="{DE183647-22AA-8541-A121-4BE048DAF433}"/>
-              </a:ext>
-            </a:extLst>
-          </p:cNvPr>
-          <p:cNvPicPr>
-            <a:picLocks noChangeArrowheads="1"/>
-          </p:cNvPicPr>
-          <p:nvPr/>
-        </p:nvPicPr>
-        <p:blipFill>
-          <a:blip r:embed="rId2">
-            <a:extLst>
-              <a:ext uri="{28A0092B-C50C-407E-A947-70E740481C1C}">
-                <a14:useLocalDpi xmlns:a14="http://schemas.microsoft.com/office/drawing/2010/main" val="0"/>
-              </a:ext>
-            </a:extLst>
-          </a:blip>
-          <a:srcRect/>
-          <a:stretch>
-            <a:fillRect/>
-          </a:stretch>
-        </p:blipFill>
-        <p:spPr bwMode="auto">
-          <a:xfrm>
-            <a:off x="6863790" y="6019533"/>
-            <a:ext cx="819157" cy="465643"/>
-          </a:xfrm>
-          <a:prstGeom prst="rect">
-            <a:avLst/>
-          </a:prstGeom>
-          <a:noFill/>
-          <a:ln>
-            <a:noFill/>
-          </a:ln>
-          <a:extLst>
-            <a:ext uri="{909E8E84-426E-40DD-AFC4-6F175D3DCCD1}">
-              <a14:hiddenFill xmlns:a14="http://schemas.microsoft.com/office/drawing/2010/main">
-                <a:solidFill>
-                  <a:srgbClr val="FFFFFF"/>
-                </a:solidFill>
-              </a14:hiddenFill>
-            </a:ext>
-            <a:ext uri="{91240B29-F687-4F45-9708-019B960494DF}">
-              <a14:hiddenLine xmlns:a14="http://schemas.microsoft.com/office/drawing/2010/main" w="12700" cap="rnd">
-                <a:solidFill>
-                  <a:srgbClr val="000000"/>
-                </a:solidFill>
-                <a:round/>
-                <a:headEnd/>
-                <a:tailEnd/>
-              </a14:hiddenLine>
-            </a:ext>
-          </a:extLst>
-        </p:spPr>
-      </p:pic>
-      <p:pic>
-        <p:nvPicPr>
-          <p:cNvPr id="26" name="circle3">
-            <a:extLst>
-              <a:ext uri="{FF2B5EF4-FFF2-40B4-BE49-F238E27FC236}">
-                <a16:creationId xmlns:a16="http://schemas.microsoft.com/office/drawing/2014/main" id="{2D291F2A-0334-B8AD-4C34-E9777ACBBFC5}"/>
-              </a:ext>
-            </a:extLst>
-          </p:cNvPr>
-          <p:cNvPicPr>
-            <a:picLocks noChangeArrowheads="1"/>
-          </p:cNvPicPr>
-          <p:nvPr/>
-        </p:nvPicPr>
-        <p:blipFill>
-          <a:blip r:embed="rId2">
-            <a:extLst>
-              <a:ext uri="{28A0092B-C50C-407E-A947-70E740481C1C}">
-                <a14:useLocalDpi xmlns:a14="http://schemas.microsoft.com/office/drawing/2010/main" val="0"/>
-              </a:ext>
-            </a:extLst>
-          </a:blip>
-          <a:srcRect/>
-          <a:stretch>
-            <a:fillRect/>
-          </a:stretch>
-        </p:blipFill>
-        <p:spPr bwMode="auto">
-          <a:xfrm>
-            <a:off x="3161389" y="6023461"/>
-            <a:ext cx="670351" cy="465643"/>
-          </a:xfrm>
-          <a:prstGeom prst="rect">
-            <a:avLst/>
-          </a:prstGeom>
-          <a:noFill/>
-          <a:ln>
-            <a:noFill/>
-          </a:ln>
-          <a:extLst>
-            <a:ext uri="{909E8E84-426E-40DD-AFC4-6F175D3DCCD1}">
-              <a14:hiddenFill xmlns:a14="http://schemas.microsoft.com/office/drawing/2010/main">
-                <a:solidFill>
-                  <a:srgbClr val="FFFFFF"/>
-                </a:solidFill>
-              </a14:hiddenFill>
-            </a:ext>
-            <a:ext uri="{91240B29-F687-4F45-9708-019B960494DF}">
-              <a14:hiddenLine xmlns:a14="http://schemas.microsoft.com/office/drawing/2010/main" w="12700" cap="rnd">
-                <a:solidFill>
-                  <a:srgbClr val="000000"/>
-                </a:solidFill>
-                <a:round/>
-                <a:headEnd/>
-                <a:tailEnd/>
-              </a14:hiddenLine>
-            </a:ext>
-          </a:extLst>
-        </p:spPr>
-      </p:pic>
       <p:sp>
         <p:nvSpPr>
           <p:cNvPr id="28" name="TextBox 27">
@@ -6778,6 +6538,126 @@
       </p:sp>
       <p:pic>
         <p:nvPicPr>
+          <p:cNvPr id="5" name="circle6">
+            <a:extLst>
+              <a:ext uri="{FF2B5EF4-FFF2-40B4-BE49-F238E27FC236}">
+                <a16:creationId xmlns:a16="http://schemas.microsoft.com/office/drawing/2014/main" id="{F8E47FE5-3FF9-E2B7-E2BA-9D51B522CD8E}"/>
+              </a:ext>
+            </a:extLst>
+          </p:cNvPr>
+          <p:cNvPicPr>
+            <a:picLocks noChangeArrowheads="1"/>
+          </p:cNvPicPr>
+          <p:nvPr/>
+        </p:nvPicPr>
+        <p:blipFill>
+          <a:blip r:embed="rId4">
+            <a:extLst>
+              <a:ext uri="{28A0092B-C50C-407E-A947-70E740481C1C}">
+                <a14:useLocalDpi xmlns:a14="http://schemas.microsoft.com/office/drawing/2010/main" val="0"/>
+              </a:ext>
+            </a:extLst>
+          </a:blip>
+          <a:srcRect/>
+          <a:stretch>
+            <a:fillRect/>
+          </a:stretch>
+        </p:blipFill>
+        <p:spPr bwMode="auto">
+          <a:xfrm>
+            <a:off x="10020300" y="6019532"/>
+            <a:ext cx="819157" cy="465643"/>
+          </a:xfrm>
+          <a:prstGeom prst="rect">
+            <a:avLst/>
+          </a:prstGeom>
+          <a:noFill/>
+          <a:ln>
+            <a:noFill/>
+          </a:ln>
+          <a:extLst>
+            <a:ext uri="{909E8E84-426E-40DD-AFC4-6F175D3DCCD1}">
+              <a14:hiddenFill xmlns:a14="http://schemas.microsoft.com/office/drawing/2010/main">
+                <a:solidFill>
+                  <a:srgbClr val="FFFFFF"/>
+                </a:solidFill>
+              </a14:hiddenFill>
+            </a:ext>
+            <a:ext uri="{91240B29-F687-4F45-9708-019B960494DF}">
+              <a14:hiddenLine xmlns:a14="http://schemas.microsoft.com/office/drawing/2010/main" w="12700" cap="rnd">
+                <a:solidFill>
+                  <a:srgbClr val="000000"/>
+                </a:solidFill>
+                <a:round/>
+                <a:headEnd/>
+                <a:tailEnd/>
+              </a14:hiddenLine>
+            </a:ext>
+          </a:extLst>
+        </p:spPr>
+      </p:pic>
+      <p:pic>
+        <p:nvPicPr>
+          <p:cNvPr id="24" name="circle5">
+            <a:extLst>
+              <a:ext uri="{FF2B5EF4-FFF2-40B4-BE49-F238E27FC236}">
+                <a16:creationId xmlns:a16="http://schemas.microsoft.com/office/drawing/2014/main" id="{DE183647-22AA-8541-A121-4BE048DAF433}"/>
+              </a:ext>
+            </a:extLst>
+          </p:cNvPr>
+          <p:cNvPicPr>
+            <a:picLocks noChangeArrowheads="1"/>
+          </p:cNvPicPr>
+          <p:nvPr/>
+        </p:nvPicPr>
+        <p:blipFill>
+          <a:blip r:embed="rId4">
+            <a:extLst>
+              <a:ext uri="{28A0092B-C50C-407E-A947-70E740481C1C}">
+                <a14:useLocalDpi xmlns:a14="http://schemas.microsoft.com/office/drawing/2010/main" val="0"/>
+              </a:ext>
+            </a:extLst>
+          </a:blip>
+          <a:srcRect/>
+          <a:stretch>
+            <a:fillRect/>
+          </a:stretch>
+        </p:blipFill>
+        <p:spPr bwMode="auto">
+          <a:xfrm>
+            <a:off x="6863790" y="6019533"/>
+            <a:ext cx="819157" cy="465643"/>
+          </a:xfrm>
+          <a:prstGeom prst="rect">
+            <a:avLst/>
+          </a:prstGeom>
+          <a:noFill/>
+          <a:ln>
+            <a:noFill/>
+          </a:ln>
+          <a:extLst>
+            <a:ext uri="{909E8E84-426E-40DD-AFC4-6F175D3DCCD1}">
+              <a14:hiddenFill xmlns:a14="http://schemas.microsoft.com/office/drawing/2010/main">
+                <a:solidFill>
+                  <a:srgbClr val="FFFFFF"/>
+                </a:solidFill>
+              </a14:hiddenFill>
+            </a:ext>
+            <a:ext uri="{91240B29-F687-4F45-9708-019B960494DF}">
+              <a14:hiddenLine xmlns:a14="http://schemas.microsoft.com/office/drawing/2010/main" w="12700" cap="rnd">
+                <a:solidFill>
+                  <a:srgbClr val="000000"/>
+                </a:solidFill>
+                <a:round/>
+                <a:headEnd/>
+                <a:tailEnd/>
+              </a14:hiddenLine>
+            </a:ext>
+          </a:extLst>
+        </p:spPr>
+      </p:pic>
+      <p:pic>
+        <p:nvPicPr>
           <p:cNvPr id="3" name="circle4">
             <a:extLst>
               <a:ext uri="{FF2B5EF4-FFF2-40B4-BE49-F238E27FC236}">
@@ -6791,7 +6671,7 @@
           <p:nvPr/>
         </p:nvPicPr>
         <p:blipFill>
-          <a:blip r:embed="rId2">
+          <a:blip r:embed="rId4">
             <a:extLst>
               <a:ext uri="{28A0092B-C50C-407E-A947-70E740481C1C}">
                 <a14:useLocalDpi xmlns:a14="http://schemas.microsoft.com/office/drawing/2010/main" val="0"/>
@@ -6807,6 +6687,186 @@
           <a:xfrm>
             <a:off x="3924487" y="6023461"/>
             <a:ext cx="670351" cy="465643"/>
+          </a:xfrm>
+          <a:prstGeom prst="rect">
+            <a:avLst/>
+          </a:prstGeom>
+          <a:noFill/>
+          <a:ln>
+            <a:noFill/>
+          </a:ln>
+          <a:extLst>
+            <a:ext uri="{909E8E84-426E-40DD-AFC4-6F175D3DCCD1}">
+              <a14:hiddenFill xmlns:a14="http://schemas.microsoft.com/office/drawing/2010/main">
+                <a:solidFill>
+                  <a:srgbClr val="FFFFFF"/>
+                </a:solidFill>
+              </a14:hiddenFill>
+            </a:ext>
+            <a:ext uri="{91240B29-F687-4F45-9708-019B960494DF}">
+              <a14:hiddenLine xmlns:a14="http://schemas.microsoft.com/office/drawing/2010/main" w="12700" cap="rnd">
+                <a:solidFill>
+                  <a:srgbClr val="000000"/>
+                </a:solidFill>
+                <a:round/>
+                <a:headEnd/>
+                <a:tailEnd/>
+              </a14:hiddenLine>
+            </a:ext>
+          </a:extLst>
+        </p:spPr>
+      </p:pic>
+      <p:pic>
+        <p:nvPicPr>
+          <p:cNvPr id="26" name="circle3">
+            <a:extLst>
+              <a:ext uri="{FF2B5EF4-FFF2-40B4-BE49-F238E27FC236}">
+                <a16:creationId xmlns:a16="http://schemas.microsoft.com/office/drawing/2014/main" id="{2D291F2A-0334-B8AD-4C34-E9777ACBBFC5}"/>
+              </a:ext>
+            </a:extLst>
+          </p:cNvPr>
+          <p:cNvPicPr>
+            <a:picLocks noChangeArrowheads="1"/>
+          </p:cNvPicPr>
+          <p:nvPr/>
+        </p:nvPicPr>
+        <p:blipFill>
+          <a:blip r:embed="rId4">
+            <a:extLst>
+              <a:ext uri="{28A0092B-C50C-407E-A947-70E740481C1C}">
+                <a14:useLocalDpi xmlns:a14="http://schemas.microsoft.com/office/drawing/2010/main" val="0"/>
+              </a:ext>
+            </a:extLst>
+          </a:blip>
+          <a:srcRect/>
+          <a:stretch>
+            <a:fillRect/>
+          </a:stretch>
+        </p:blipFill>
+        <p:spPr bwMode="auto">
+          <a:xfrm>
+            <a:off x="3161389" y="6023461"/>
+            <a:ext cx="670351" cy="465643"/>
+          </a:xfrm>
+          <a:prstGeom prst="rect">
+            <a:avLst/>
+          </a:prstGeom>
+          <a:noFill/>
+          <a:ln>
+            <a:noFill/>
+          </a:ln>
+          <a:extLst>
+            <a:ext uri="{909E8E84-426E-40DD-AFC4-6F175D3DCCD1}">
+              <a14:hiddenFill xmlns:a14="http://schemas.microsoft.com/office/drawing/2010/main">
+                <a:solidFill>
+                  <a:srgbClr val="FFFFFF"/>
+                </a:solidFill>
+              </a14:hiddenFill>
+            </a:ext>
+            <a:ext uri="{91240B29-F687-4F45-9708-019B960494DF}">
+              <a14:hiddenLine xmlns:a14="http://schemas.microsoft.com/office/drawing/2010/main" w="12700" cap="rnd">
+                <a:solidFill>
+                  <a:srgbClr val="000000"/>
+                </a:solidFill>
+                <a:round/>
+                <a:headEnd/>
+                <a:tailEnd/>
+              </a14:hiddenLine>
+            </a:ext>
+          </a:extLst>
+        </p:spPr>
+      </p:pic>
+      <p:pic>
+        <p:nvPicPr>
+          <p:cNvPr id="2" name="circle2">
+            <a:extLst>
+              <a:ext uri="{FF2B5EF4-FFF2-40B4-BE49-F238E27FC236}">
+                <a16:creationId xmlns:a16="http://schemas.microsoft.com/office/drawing/2014/main" id="{A5198007-C77A-BF58-C790-A9948191397E}"/>
+              </a:ext>
+            </a:extLst>
+          </p:cNvPr>
+          <p:cNvPicPr>
+            <a:picLocks noChangeArrowheads="1"/>
+          </p:cNvPicPr>
+          <p:nvPr/>
+        </p:nvPicPr>
+        <p:blipFill>
+          <a:blip r:embed="rId4">
+            <a:extLst>
+              <a:ext uri="{28A0092B-C50C-407E-A947-70E740481C1C}">
+                <a14:useLocalDpi xmlns:a14="http://schemas.microsoft.com/office/drawing/2010/main" val="0"/>
+              </a:ext>
+            </a:extLst>
+          </a:blip>
+          <a:srcRect/>
+          <a:stretch>
+            <a:fillRect/>
+          </a:stretch>
+        </p:blipFill>
+        <p:spPr bwMode="auto">
+          <a:xfrm>
+            <a:off x="3707536" y="3213331"/>
+            <a:ext cx="1142784" cy="437638"/>
+          </a:xfrm>
+          <a:prstGeom prst="rect">
+            <a:avLst/>
+          </a:prstGeom>
+          <a:noFill/>
+          <a:ln>
+            <a:noFill/>
+          </a:ln>
+          <a:extLst>
+            <a:ext uri="{909E8E84-426E-40DD-AFC4-6F175D3DCCD1}">
+              <a14:hiddenFill xmlns:a14="http://schemas.microsoft.com/office/drawing/2010/main">
+                <a:solidFill>
+                  <a:srgbClr val="FFFFFF"/>
+                </a:solidFill>
+              </a14:hiddenFill>
+            </a:ext>
+            <a:ext uri="{91240B29-F687-4F45-9708-019B960494DF}">
+              <a14:hiddenLine xmlns:a14="http://schemas.microsoft.com/office/drawing/2010/main" w="12700" cap="rnd">
+                <a:solidFill>
+                  <a:srgbClr val="000000"/>
+                </a:solidFill>
+                <a:round/>
+                <a:headEnd/>
+                <a:tailEnd/>
+              </a14:hiddenLine>
+            </a:ext>
+          </a:extLst>
+        </p:spPr>
+      </p:pic>
+      <p:pic>
+        <p:nvPicPr>
+          <p:cNvPr id="11" name="circle1">
+            <a:extLst>
+              <a:ext uri="{FF2B5EF4-FFF2-40B4-BE49-F238E27FC236}">
+                <a16:creationId xmlns:a16="http://schemas.microsoft.com/office/drawing/2014/main" id="{78BD61EB-1D6B-EF6F-3261-F263E6F3C460}"/>
+              </a:ext>
+            </a:extLst>
+          </p:cNvPr>
+          <p:cNvPicPr>
+            <a:picLocks noChangeArrowheads="1"/>
+          </p:cNvPicPr>
+          <p:nvPr/>
+        </p:nvPicPr>
+        <p:blipFill>
+          <a:blip r:embed="rId4">
+            <a:extLst>
+              <a:ext uri="{28A0092B-C50C-407E-A947-70E740481C1C}">
+                <a14:useLocalDpi xmlns:a14="http://schemas.microsoft.com/office/drawing/2010/main" val="0"/>
+              </a:ext>
+            </a:extLst>
+          </a:blip>
+          <a:srcRect/>
+          <a:stretch>
+            <a:fillRect/>
+          </a:stretch>
+        </p:blipFill>
+        <p:spPr bwMode="auto">
+          <a:xfrm>
+            <a:off x="8833611" y="3216154"/>
+            <a:ext cx="844983" cy="437638"/>
           </a:xfrm>
           <a:prstGeom prst="rect">
             <a:avLst/>
@@ -6857,7 +6917,7 @@
         <p:cNvPr id="1" name="">
           <a:extLst>
             <a:ext uri="{FF2B5EF4-FFF2-40B4-BE49-F238E27FC236}">
-              <a16:creationId xmlns:a16="http://schemas.microsoft.com/office/drawing/2014/main" id="{512CF639-6E80-101A-0D4B-E068A94DB6E5}"/>
+              <a16:creationId xmlns:a16="http://schemas.microsoft.com/office/drawing/2014/main" id="{4B768CFC-30F8-4C2F-E100-A4B54867FAB4}"/>
             </a:ext>
           </a:extLst>
         </p:cNvPr>
@@ -6877,7 +6937,7 @@
           <p:cNvPr id="55" name="화살표: 오른쪽 54">
             <a:extLst>
               <a:ext uri="{FF2B5EF4-FFF2-40B4-BE49-F238E27FC236}">
-                <a16:creationId xmlns:a16="http://schemas.microsoft.com/office/drawing/2014/main" id="{1D43457A-439B-38AC-ABBB-66AAB429B57E}"/>
+                <a16:creationId xmlns:a16="http://schemas.microsoft.com/office/drawing/2014/main" id="{BF0827A5-12D8-E957-2D2F-5021FF6AAD94}"/>
               </a:ext>
             </a:extLst>
           </p:cNvPr>
@@ -6934,7 +6994,7 @@
           <p:cNvPr id="4" name="직선 연결선 3">
             <a:extLst>
               <a:ext uri="{FF2B5EF4-FFF2-40B4-BE49-F238E27FC236}">
-                <a16:creationId xmlns:a16="http://schemas.microsoft.com/office/drawing/2014/main" id="{86ABD23B-418E-729C-CCB2-24B87ACE3A9E}"/>
+                <a16:creationId xmlns:a16="http://schemas.microsoft.com/office/drawing/2014/main" id="{F6B5880A-6F8F-A1EF-549E-74135645223A}"/>
               </a:ext>
             </a:extLst>
           </p:cNvPr>
@@ -6979,7 +7039,7 @@
           <p:cNvPr id="7" name="TextBox 6">
             <a:extLst>
               <a:ext uri="{FF2B5EF4-FFF2-40B4-BE49-F238E27FC236}">
-                <a16:creationId xmlns:a16="http://schemas.microsoft.com/office/drawing/2014/main" id="{E25B916F-1473-0071-CDE9-42F9A4252662}"/>
+                <a16:creationId xmlns:a16="http://schemas.microsoft.com/office/drawing/2014/main" id="{DB880713-4A85-E2EC-679E-7D6D13CC78ED}"/>
               </a:ext>
             </a:extLst>
           </p:cNvPr>
@@ -7054,72 +7114,12 @@
           </a:p>
         </p:txBody>
       </p:sp>
-      <p:pic>
-        <p:nvPicPr>
-          <p:cNvPr id="11" name="circle1">
-            <a:extLst>
-              <a:ext uri="{FF2B5EF4-FFF2-40B4-BE49-F238E27FC236}">
-                <a16:creationId xmlns:a16="http://schemas.microsoft.com/office/drawing/2014/main" id="{07395C77-5DB1-43C9-1561-387242945D9F}"/>
-              </a:ext>
-            </a:extLst>
-          </p:cNvPr>
-          <p:cNvPicPr>
-            <a:picLocks noChangeArrowheads="1"/>
-          </p:cNvPicPr>
-          <p:nvPr/>
-        </p:nvPicPr>
-        <p:blipFill>
-          <a:blip r:embed="rId2">
-            <a:extLst>
-              <a:ext uri="{28A0092B-C50C-407E-A947-70E740481C1C}">
-                <a14:useLocalDpi xmlns:a14="http://schemas.microsoft.com/office/drawing/2010/main" val="0"/>
-              </a:ext>
-            </a:extLst>
-          </a:blip>
-          <a:srcRect/>
-          <a:stretch>
-            <a:fillRect/>
-          </a:stretch>
-        </p:blipFill>
-        <p:spPr bwMode="auto">
-          <a:xfrm>
-            <a:off x="8833611" y="3216154"/>
-            <a:ext cx="844983" cy="437638"/>
-          </a:xfrm>
-          <a:prstGeom prst="rect">
-            <a:avLst/>
-          </a:prstGeom>
-          <a:noFill/>
-          <a:ln>
-            <a:noFill/>
-          </a:ln>
-          <a:extLst>
-            <a:ext uri="{909E8E84-426E-40DD-AFC4-6F175D3DCCD1}">
-              <a14:hiddenFill xmlns:a14="http://schemas.microsoft.com/office/drawing/2010/main">
-                <a:solidFill>
-                  <a:srgbClr val="FFFFFF"/>
-                </a:solidFill>
-              </a14:hiddenFill>
-            </a:ext>
-            <a:ext uri="{91240B29-F687-4F45-9708-019B960494DF}">
-              <a14:hiddenLine xmlns:a14="http://schemas.microsoft.com/office/drawing/2010/main" w="12700" cap="rnd">
-                <a:solidFill>
-                  <a:srgbClr val="000000"/>
-                </a:solidFill>
-                <a:round/>
-                <a:headEnd/>
-                <a:tailEnd/>
-              </a14:hiddenLine>
-            </a:ext>
-          </a:extLst>
-        </p:spPr>
-      </p:pic>
       <p:graphicFrame>
         <p:nvGraphicFramePr>
           <p:cNvPr id="16" name="chart_phase">
             <a:extLst>
               <a:ext uri="{FF2B5EF4-FFF2-40B4-BE49-F238E27FC236}">
-                <a16:creationId xmlns:a16="http://schemas.microsoft.com/office/drawing/2014/main" id="{5FA406A3-5717-A756-E263-E9A25EC12703}"/>
+                <a16:creationId xmlns:a16="http://schemas.microsoft.com/office/drawing/2014/main" id="{C585DE21-0C58-BD8B-5BC4-053F8174C682}"/>
               </a:ext>
             </a:extLst>
           </p:cNvPr>
@@ -7132,7 +7132,7 @@
         </p:xfrm>
         <a:graphic>
           <a:graphicData uri="http://schemas.openxmlformats.org/drawingml/2006/chart">
-            <c:chart xmlns:c="http://schemas.openxmlformats.org/drawingml/2006/chart" xmlns:r="http://schemas.openxmlformats.org/officeDocument/2006/relationships" r:id="rId3"/>
+            <c:chart xmlns:c="http://schemas.openxmlformats.org/drawingml/2006/chart" xmlns:r="http://schemas.openxmlformats.org/officeDocument/2006/relationships" r:id="rId2"/>
           </a:graphicData>
         </a:graphic>
       </p:graphicFrame>
@@ -7141,7 +7141,7 @@
           <p:cNvPr id="25" name="사각형: 둥근 모서리 24">
             <a:extLst>
               <a:ext uri="{FF2B5EF4-FFF2-40B4-BE49-F238E27FC236}">
-                <a16:creationId xmlns:a16="http://schemas.microsoft.com/office/drawing/2014/main" id="{8DD4D0C0-ECE4-319E-B676-15E4D6CDA332}"/>
+                <a16:creationId xmlns:a16="http://schemas.microsoft.com/office/drawing/2014/main" id="{D4351906-E4FB-A366-A6B9-A2B6602A601A}"/>
               </a:ext>
             </a:extLst>
           </p:cNvPr>
@@ -7210,72 +7210,12 @@
           </a:p>
         </p:txBody>
       </p:sp>
-      <p:pic>
-        <p:nvPicPr>
-          <p:cNvPr id="2" name="circle2">
-            <a:extLst>
-              <a:ext uri="{FF2B5EF4-FFF2-40B4-BE49-F238E27FC236}">
-                <a16:creationId xmlns:a16="http://schemas.microsoft.com/office/drawing/2014/main" id="{D2F1601D-366F-6466-123C-0A5294A3A258}"/>
-              </a:ext>
-            </a:extLst>
-          </p:cNvPr>
-          <p:cNvPicPr>
-            <a:picLocks noChangeArrowheads="1"/>
-          </p:cNvPicPr>
-          <p:nvPr/>
-        </p:nvPicPr>
-        <p:blipFill>
-          <a:blip r:embed="rId2">
-            <a:extLst>
-              <a:ext uri="{28A0092B-C50C-407E-A947-70E740481C1C}">
-                <a14:useLocalDpi xmlns:a14="http://schemas.microsoft.com/office/drawing/2010/main" val="0"/>
-              </a:ext>
-            </a:extLst>
-          </a:blip>
-          <a:srcRect/>
-          <a:stretch>
-            <a:fillRect/>
-          </a:stretch>
-        </p:blipFill>
-        <p:spPr bwMode="auto">
-          <a:xfrm>
-            <a:off x="3707536" y="3213331"/>
-            <a:ext cx="1142784" cy="437638"/>
-          </a:xfrm>
-          <a:prstGeom prst="rect">
-            <a:avLst/>
-          </a:prstGeom>
-          <a:noFill/>
-          <a:ln>
-            <a:noFill/>
-          </a:ln>
-          <a:extLst>
-            <a:ext uri="{909E8E84-426E-40DD-AFC4-6F175D3DCCD1}">
-              <a14:hiddenFill xmlns:a14="http://schemas.microsoft.com/office/drawing/2010/main">
-                <a:solidFill>
-                  <a:srgbClr val="FFFFFF"/>
-                </a:solidFill>
-              </a14:hiddenFill>
-            </a:ext>
-            <a:ext uri="{91240B29-F687-4F45-9708-019B960494DF}">
-              <a14:hiddenLine xmlns:a14="http://schemas.microsoft.com/office/drawing/2010/main" w="12700" cap="rnd">
-                <a:solidFill>
-                  <a:srgbClr val="000000"/>
-                </a:solidFill>
-                <a:round/>
-                <a:headEnd/>
-                <a:tailEnd/>
-              </a14:hiddenLine>
-            </a:ext>
-          </a:extLst>
-        </p:spPr>
-      </p:pic>
       <p:sp>
         <p:nvSpPr>
           <p:cNvPr id="14" name="직사각형 13">
             <a:extLst>
               <a:ext uri="{FF2B5EF4-FFF2-40B4-BE49-F238E27FC236}">
-                <a16:creationId xmlns:a16="http://schemas.microsoft.com/office/drawing/2014/main" id="{103075F4-EDA1-286D-803F-18A7DCBAD9EB}"/>
+                <a16:creationId xmlns:a16="http://schemas.microsoft.com/office/drawing/2014/main" id="{9A5511A9-4113-91F0-E123-8D15976CE54E}"/>
               </a:ext>
             </a:extLst>
           </p:cNvPr>
@@ -7333,7 +7273,7 @@
           <p:cNvPr id="15" name="직사각형 14">
             <a:extLst>
               <a:ext uri="{FF2B5EF4-FFF2-40B4-BE49-F238E27FC236}">
-                <a16:creationId xmlns:a16="http://schemas.microsoft.com/office/drawing/2014/main" id="{6246D4F6-2F91-EF10-9550-88B617E49DE7}"/>
+                <a16:creationId xmlns:a16="http://schemas.microsoft.com/office/drawing/2014/main" id="{779DD65C-D9F1-84F9-9A1F-49F9F69090C1}"/>
               </a:ext>
             </a:extLst>
           </p:cNvPr>
@@ -7389,7 +7329,7 @@
           <p:cNvPr id="17" name="직선 연결선 16">
             <a:extLst>
               <a:ext uri="{FF2B5EF4-FFF2-40B4-BE49-F238E27FC236}">
-                <a16:creationId xmlns:a16="http://schemas.microsoft.com/office/drawing/2014/main" id="{CB9C1366-513C-0563-56B6-7425FC6741B2}"/>
+                <a16:creationId xmlns:a16="http://schemas.microsoft.com/office/drawing/2014/main" id="{A29DEDA9-78BE-C3D1-0C51-787A56A12B33}"/>
               </a:ext>
             </a:extLst>
           </p:cNvPr>
@@ -7434,7 +7374,7 @@
           <p:cNvPr id="18" name="사각형: 둥근 모서리 17">
             <a:extLst>
               <a:ext uri="{FF2B5EF4-FFF2-40B4-BE49-F238E27FC236}">
-                <a16:creationId xmlns:a16="http://schemas.microsoft.com/office/drawing/2014/main" id="{0E83AFCE-3C3A-BF05-5C26-10099AA1D690}"/>
+                <a16:creationId xmlns:a16="http://schemas.microsoft.com/office/drawing/2014/main" id="{E5108EBB-F91D-A348-D1CA-EC6211388A4C}"/>
               </a:ext>
             </a:extLst>
           </p:cNvPr>
@@ -7526,7 +7466,7 @@
           <p:cNvPr id="19" name="사각형: 둥근 모서리 18">
             <a:extLst>
               <a:ext uri="{FF2B5EF4-FFF2-40B4-BE49-F238E27FC236}">
-                <a16:creationId xmlns:a16="http://schemas.microsoft.com/office/drawing/2014/main" id="{B17E2DBE-DCEB-D8CB-D010-F5FE60C9587F}"/>
+                <a16:creationId xmlns:a16="http://schemas.microsoft.com/office/drawing/2014/main" id="{E80B10BB-2555-1E78-BBC8-566724AFC756}"/>
               </a:ext>
             </a:extLst>
           </p:cNvPr>
@@ -7618,7 +7558,7 @@
           <p:cNvPr id="20" name="직선 화살표 연결선 19">
             <a:extLst>
               <a:ext uri="{FF2B5EF4-FFF2-40B4-BE49-F238E27FC236}">
-                <a16:creationId xmlns:a16="http://schemas.microsoft.com/office/drawing/2014/main" id="{3BEE11A9-745B-B97E-E84E-959525FC3BA5}"/>
+                <a16:creationId xmlns:a16="http://schemas.microsoft.com/office/drawing/2014/main" id="{CE33DB5B-585A-261C-C45A-AA463AB75329}"/>
               </a:ext>
             </a:extLst>
           </p:cNvPr>
@@ -7658,7 +7598,7 @@
           <p:cNvPr id="21" name="직선 화살표 연결선 20">
             <a:extLst>
               <a:ext uri="{FF2B5EF4-FFF2-40B4-BE49-F238E27FC236}">
-                <a16:creationId xmlns:a16="http://schemas.microsoft.com/office/drawing/2014/main" id="{F6D19FC1-1EAE-1671-8BB7-64C35E66C022}"/>
+                <a16:creationId xmlns:a16="http://schemas.microsoft.com/office/drawing/2014/main" id="{980EC1E9-700F-F20D-3C1F-5CB7DF8D161C}"/>
               </a:ext>
             </a:extLst>
           </p:cNvPr>
@@ -7700,7 +7640,7 @@
           <p:cNvPr id="22" name="chart_strategy">
             <a:extLst>
               <a:ext uri="{FF2B5EF4-FFF2-40B4-BE49-F238E27FC236}">
-                <a16:creationId xmlns:a16="http://schemas.microsoft.com/office/drawing/2014/main" id="{DE79F0A8-3CA1-0509-71B2-CD92EFF70073}"/>
+                <a16:creationId xmlns:a16="http://schemas.microsoft.com/office/drawing/2014/main" id="{3730660A-2C31-D26C-FBD9-A6D1CEA9BEBA}"/>
               </a:ext>
             </a:extLst>
           </p:cNvPr>
@@ -7713,136 +7653,16 @@
         </p:xfrm>
         <a:graphic>
           <a:graphicData uri="http://schemas.openxmlformats.org/drawingml/2006/chart">
-            <c:chart xmlns:c="http://schemas.openxmlformats.org/drawingml/2006/chart" xmlns:r="http://schemas.openxmlformats.org/officeDocument/2006/relationships" r:id="rId4"/>
+            <c:chart xmlns:c="http://schemas.openxmlformats.org/drawingml/2006/chart" xmlns:r="http://schemas.openxmlformats.org/officeDocument/2006/relationships" r:id="rId3"/>
           </a:graphicData>
         </a:graphic>
       </p:graphicFrame>
-      <p:pic>
-        <p:nvPicPr>
-          <p:cNvPr id="24" name="circle5">
-            <a:extLst>
-              <a:ext uri="{FF2B5EF4-FFF2-40B4-BE49-F238E27FC236}">
-                <a16:creationId xmlns:a16="http://schemas.microsoft.com/office/drawing/2014/main" id="{BBB01498-37FE-B11E-A6FE-D012FEB928D0}"/>
-              </a:ext>
-            </a:extLst>
-          </p:cNvPr>
-          <p:cNvPicPr>
-            <a:picLocks noChangeArrowheads="1"/>
-          </p:cNvPicPr>
-          <p:nvPr/>
-        </p:nvPicPr>
-        <p:blipFill>
-          <a:blip r:embed="rId2">
-            <a:extLst>
-              <a:ext uri="{28A0092B-C50C-407E-A947-70E740481C1C}">
-                <a14:useLocalDpi xmlns:a14="http://schemas.microsoft.com/office/drawing/2010/main" val="0"/>
-              </a:ext>
-            </a:extLst>
-          </a:blip>
-          <a:srcRect/>
-          <a:stretch>
-            <a:fillRect/>
-          </a:stretch>
-        </p:blipFill>
-        <p:spPr bwMode="auto">
-          <a:xfrm>
-            <a:off x="6863790" y="6019533"/>
-            <a:ext cx="819157" cy="465643"/>
-          </a:xfrm>
-          <a:prstGeom prst="rect">
-            <a:avLst/>
-          </a:prstGeom>
-          <a:noFill/>
-          <a:ln>
-            <a:noFill/>
-          </a:ln>
-          <a:extLst>
-            <a:ext uri="{909E8E84-426E-40DD-AFC4-6F175D3DCCD1}">
-              <a14:hiddenFill xmlns:a14="http://schemas.microsoft.com/office/drawing/2010/main">
-                <a:solidFill>
-                  <a:srgbClr val="FFFFFF"/>
-                </a:solidFill>
-              </a14:hiddenFill>
-            </a:ext>
-            <a:ext uri="{91240B29-F687-4F45-9708-019B960494DF}">
-              <a14:hiddenLine xmlns:a14="http://schemas.microsoft.com/office/drawing/2010/main" w="12700" cap="rnd">
-                <a:solidFill>
-                  <a:srgbClr val="000000"/>
-                </a:solidFill>
-                <a:round/>
-                <a:headEnd/>
-                <a:tailEnd/>
-              </a14:hiddenLine>
-            </a:ext>
-          </a:extLst>
-        </p:spPr>
-      </p:pic>
-      <p:pic>
-        <p:nvPicPr>
-          <p:cNvPr id="26" name="circle3">
-            <a:extLst>
-              <a:ext uri="{FF2B5EF4-FFF2-40B4-BE49-F238E27FC236}">
-                <a16:creationId xmlns:a16="http://schemas.microsoft.com/office/drawing/2014/main" id="{EA3B143A-9166-9501-5BB8-E43384BE4A78}"/>
-              </a:ext>
-            </a:extLst>
-          </p:cNvPr>
-          <p:cNvPicPr>
-            <a:picLocks noChangeArrowheads="1"/>
-          </p:cNvPicPr>
-          <p:nvPr/>
-        </p:nvPicPr>
-        <p:blipFill>
-          <a:blip r:embed="rId2">
-            <a:extLst>
-              <a:ext uri="{28A0092B-C50C-407E-A947-70E740481C1C}">
-                <a14:useLocalDpi xmlns:a14="http://schemas.microsoft.com/office/drawing/2010/main" val="0"/>
-              </a:ext>
-            </a:extLst>
-          </a:blip>
-          <a:srcRect/>
-          <a:stretch>
-            <a:fillRect/>
-          </a:stretch>
-        </p:blipFill>
-        <p:spPr bwMode="auto">
-          <a:xfrm>
-            <a:off x="3161389" y="6023461"/>
-            <a:ext cx="670351" cy="465643"/>
-          </a:xfrm>
-          <a:prstGeom prst="rect">
-            <a:avLst/>
-          </a:prstGeom>
-          <a:noFill/>
-          <a:ln>
-            <a:noFill/>
-          </a:ln>
-          <a:extLst>
-            <a:ext uri="{909E8E84-426E-40DD-AFC4-6F175D3DCCD1}">
-              <a14:hiddenFill xmlns:a14="http://schemas.microsoft.com/office/drawing/2010/main">
-                <a:solidFill>
-                  <a:srgbClr val="FFFFFF"/>
-                </a:solidFill>
-              </a14:hiddenFill>
-            </a:ext>
-            <a:ext uri="{91240B29-F687-4F45-9708-019B960494DF}">
-              <a14:hiddenLine xmlns:a14="http://schemas.microsoft.com/office/drawing/2010/main" w="12700" cap="rnd">
-                <a:solidFill>
-                  <a:srgbClr val="000000"/>
-                </a:solidFill>
-                <a:round/>
-                <a:headEnd/>
-                <a:tailEnd/>
-              </a14:hiddenLine>
-            </a:ext>
-          </a:extLst>
-        </p:spPr>
-      </p:pic>
       <p:sp>
         <p:nvSpPr>
           <p:cNvPr id="28" name="TextBox 27">
             <a:extLst>
               <a:ext uri="{FF2B5EF4-FFF2-40B4-BE49-F238E27FC236}">
-                <a16:creationId xmlns:a16="http://schemas.microsoft.com/office/drawing/2014/main" id="{5C0D05A7-1A40-24A0-A983-7BEC1C517D2D}"/>
+                <a16:creationId xmlns:a16="http://schemas.microsoft.com/office/drawing/2014/main" id="{666AD86A-68EC-07FD-6B61-8873F06966C0}"/>
               </a:ext>
             </a:extLst>
           </p:cNvPr>
@@ -7915,7 +7735,7 @@
           <p:cNvPr id="29" name="사각형: 둥근 모서리 28">
             <a:extLst>
               <a:ext uri="{FF2B5EF4-FFF2-40B4-BE49-F238E27FC236}">
-                <a16:creationId xmlns:a16="http://schemas.microsoft.com/office/drawing/2014/main" id="{881491CE-703F-ECEF-5FB2-53BAC12E7C75}"/>
+                <a16:creationId xmlns:a16="http://schemas.microsoft.com/office/drawing/2014/main" id="{2885D7C2-E0E7-26D9-836D-3D1849AEB4A1}"/>
               </a:ext>
             </a:extLst>
           </p:cNvPr>
@@ -7986,10 +7806,10 @@
       </p:sp>
       <p:pic>
         <p:nvPicPr>
-          <p:cNvPr id="3" name="circle4">
+          <p:cNvPr id="5" name="circle6">
             <a:extLst>
               <a:ext uri="{FF2B5EF4-FFF2-40B4-BE49-F238E27FC236}">
-                <a16:creationId xmlns:a16="http://schemas.microsoft.com/office/drawing/2014/main" id="{37E047D5-90DE-DC1A-634B-8148FBD1C397}"/>
+                <a16:creationId xmlns:a16="http://schemas.microsoft.com/office/drawing/2014/main" id="{3F41A5DB-707B-B143-1EC5-6D85B6BCE393}"/>
               </a:ext>
             </a:extLst>
           </p:cNvPr>
@@ -7999,7 +7819,127 @@
           <p:nvPr/>
         </p:nvPicPr>
         <p:blipFill>
-          <a:blip r:embed="rId2">
+          <a:blip r:embed="rId4">
+            <a:extLst>
+              <a:ext uri="{28A0092B-C50C-407E-A947-70E740481C1C}">
+                <a14:useLocalDpi xmlns:a14="http://schemas.microsoft.com/office/drawing/2010/main" val="0"/>
+              </a:ext>
+            </a:extLst>
+          </a:blip>
+          <a:srcRect/>
+          <a:stretch>
+            <a:fillRect/>
+          </a:stretch>
+        </p:blipFill>
+        <p:spPr bwMode="auto">
+          <a:xfrm>
+            <a:off x="10020300" y="6019532"/>
+            <a:ext cx="819157" cy="465643"/>
+          </a:xfrm>
+          <a:prstGeom prst="rect">
+            <a:avLst/>
+          </a:prstGeom>
+          <a:noFill/>
+          <a:ln>
+            <a:noFill/>
+          </a:ln>
+          <a:extLst>
+            <a:ext uri="{909E8E84-426E-40DD-AFC4-6F175D3DCCD1}">
+              <a14:hiddenFill xmlns:a14="http://schemas.microsoft.com/office/drawing/2010/main">
+                <a:solidFill>
+                  <a:srgbClr val="FFFFFF"/>
+                </a:solidFill>
+              </a14:hiddenFill>
+            </a:ext>
+            <a:ext uri="{91240B29-F687-4F45-9708-019B960494DF}">
+              <a14:hiddenLine xmlns:a14="http://schemas.microsoft.com/office/drawing/2010/main" w="12700" cap="rnd">
+                <a:solidFill>
+                  <a:srgbClr val="000000"/>
+                </a:solidFill>
+                <a:round/>
+                <a:headEnd/>
+                <a:tailEnd/>
+              </a14:hiddenLine>
+            </a:ext>
+          </a:extLst>
+        </p:spPr>
+      </p:pic>
+      <p:pic>
+        <p:nvPicPr>
+          <p:cNvPr id="24" name="circle5">
+            <a:extLst>
+              <a:ext uri="{FF2B5EF4-FFF2-40B4-BE49-F238E27FC236}">
+                <a16:creationId xmlns:a16="http://schemas.microsoft.com/office/drawing/2014/main" id="{958F7167-F693-41E2-D11C-318E993FA213}"/>
+              </a:ext>
+            </a:extLst>
+          </p:cNvPr>
+          <p:cNvPicPr>
+            <a:picLocks noChangeArrowheads="1"/>
+          </p:cNvPicPr>
+          <p:nvPr/>
+        </p:nvPicPr>
+        <p:blipFill>
+          <a:blip r:embed="rId4">
+            <a:extLst>
+              <a:ext uri="{28A0092B-C50C-407E-A947-70E740481C1C}">
+                <a14:useLocalDpi xmlns:a14="http://schemas.microsoft.com/office/drawing/2010/main" val="0"/>
+              </a:ext>
+            </a:extLst>
+          </a:blip>
+          <a:srcRect/>
+          <a:stretch>
+            <a:fillRect/>
+          </a:stretch>
+        </p:blipFill>
+        <p:spPr bwMode="auto">
+          <a:xfrm>
+            <a:off x="6863790" y="6019533"/>
+            <a:ext cx="819157" cy="465643"/>
+          </a:xfrm>
+          <a:prstGeom prst="rect">
+            <a:avLst/>
+          </a:prstGeom>
+          <a:noFill/>
+          <a:ln>
+            <a:noFill/>
+          </a:ln>
+          <a:extLst>
+            <a:ext uri="{909E8E84-426E-40DD-AFC4-6F175D3DCCD1}">
+              <a14:hiddenFill xmlns:a14="http://schemas.microsoft.com/office/drawing/2010/main">
+                <a:solidFill>
+                  <a:srgbClr val="FFFFFF"/>
+                </a:solidFill>
+              </a14:hiddenFill>
+            </a:ext>
+            <a:ext uri="{91240B29-F687-4F45-9708-019B960494DF}">
+              <a14:hiddenLine xmlns:a14="http://schemas.microsoft.com/office/drawing/2010/main" w="12700" cap="rnd">
+                <a:solidFill>
+                  <a:srgbClr val="000000"/>
+                </a:solidFill>
+                <a:round/>
+                <a:headEnd/>
+                <a:tailEnd/>
+              </a14:hiddenLine>
+            </a:ext>
+          </a:extLst>
+        </p:spPr>
+      </p:pic>
+      <p:pic>
+        <p:nvPicPr>
+          <p:cNvPr id="3" name="circle4">
+            <a:extLst>
+              <a:ext uri="{FF2B5EF4-FFF2-40B4-BE49-F238E27FC236}">
+                <a16:creationId xmlns:a16="http://schemas.microsoft.com/office/drawing/2014/main" id="{15A27740-F2DE-0D0E-9CAB-E168C21F170B}"/>
+              </a:ext>
+            </a:extLst>
+          </p:cNvPr>
+          <p:cNvPicPr>
+            <a:picLocks noChangeArrowheads="1"/>
+          </p:cNvPicPr>
+          <p:nvPr/>
+        </p:nvPicPr>
+        <p:blipFill>
+          <a:blip r:embed="rId4">
             <a:extLst>
               <a:ext uri="{28A0092B-C50C-407E-A947-70E740481C1C}">
                 <a14:useLocalDpi xmlns:a14="http://schemas.microsoft.com/office/drawing/2010/main" val="0"/>
@@ -8044,10 +7984,190 @@
           </a:extLst>
         </p:spPr>
       </p:pic>
+      <p:pic>
+        <p:nvPicPr>
+          <p:cNvPr id="26" name="circle3">
+            <a:extLst>
+              <a:ext uri="{FF2B5EF4-FFF2-40B4-BE49-F238E27FC236}">
+                <a16:creationId xmlns:a16="http://schemas.microsoft.com/office/drawing/2014/main" id="{FC882569-B63E-BFA8-FF48-28047D8CA844}"/>
+              </a:ext>
+            </a:extLst>
+          </p:cNvPr>
+          <p:cNvPicPr>
+            <a:picLocks noChangeArrowheads="1"/>
+          </p:cNvPicPr>
+          <p:nvPr/>
+        </p:nvPicPr>
+        <p:blipFill>
+          <a:blip r:embed="rId4">
+            <a:extLst>
+              <a:ext uri="{28A0092B-C50C-407E-A947-70E740481C1C}">
+                <a14:useLocalDpi xmlns:a14="http://schemas.microsoft.com/office/drawing/2010/main" val="0"/>
+              </a:ext>
+            </a:extLst>
+          </a:blip>
+          <a:srcRect/>
+          <a:stretch>
+            <a:fillRect/>
+          </a:stretch>
+        </p:blipFill>
+        <p:spPr bwMode="auto">
+          <a:xfrm>
+            <a:off x="3161389" y="6023461"/>
+            <a:ext cx="670351" cy="465643"/>
+          </a:xfrm>
+          <a:prstGeom prst="rect">
+            <a:avLst/>
+          </a:prstGeom>
+          <a:noFill/>
+          <a:ln>
+            <a:noFill/>
+          </a:ln>
+          <a:extLst>
+            <a:ext uri="{909E8E84-426E-40DD-AFC4-6F175D3DCCD1}">
+              <a14:hiddenFill xmlns:a14="http://schemas.microsoft.com/office/drawing/2010/main">
+                <a:solidFill>
+                  <a:srgbClr val="FFFFFF"/>
+                </a:solidFill>
+              </a14:hiddenFill>
+            </a:ext>
+            <a:ext uri="{91240B29-F687-4F45-9708-019B960494DF}">
+              <a14:hiddenLine xmlns:a14="http://schemas.microsoft.com/office/drawing/2010/main" w="12700" cap="rnd">
+                <a:solidFill>
+                  <a:srgbClr val="000000"/>
+                </a:solidFill>
+                <a:round/>
+                <a:headEnd/>
+                <a:tailEnd/>
+              </a14:hiddenLine>
+            </a:ext>
+          </a:extLst>
+        </p:spPr>
+      </p:pic>
+      <p:pic>
+        <p:nvPicPr>
+          <p:cNvPr id="2" name="circle2">
+            <a:extLst>
+              <a:ext uri="{FF2B5EF4-FFF2-40B4-BE49-F238E27FC236}">
+                <a16:creationId xmlns:a16="http://schemas.microsoft.com/office/drawing/2014/main" id="{C6D85127-819B-98A7-FC99-E977DCE18039}"/>
+              </a:ext>
+            </a:extLst>
+          </p:cNvPr>
+          <p:cNvPicPr>
+            <a:picLocks noChangeArrowheads="1"/>
+          </p:cNvPicPr>
+          <p:nvPr/>
+        </p:nvPicPr>
+        <p:blipFill>
+          <a:blip r:embed="rId4">
+            <a:extLst>
+              <a:ext uri="{28A0092B-C50C-407E-A947-70E740481C1C}">
+                <a14:useLocalDpi xmlns:a14="http://schemas.microsoft.com/office/drawing/2010/main" val="0"/>
+              </a:ext>
+            </a:extLst>
+          </a:blip>
+          <a:srcRect/>
+          <a:stretch>
+            <a:fillRect/>
+          </a:stretch>
+        </p:blipFill>
+        <p:spPr bwMode="auto">
+          <a:xfrm>
+            <a:off x="3707536" y="3213331"/>
+            <a:ext cx="1142784" cy="437638"/>
+          </a:xfrm>
+          <a:prstGeom prst="rect">
+            <a:avLst/>
+          </a:prstGeom>
+          <a:noFill/>
+          <a:ln>
+            <a:noFill/>
+          </a:ln>
+          <a:extLst>
+            <a:ext uri="{909E8E84-426E-40DD-AFC4-6F175D3DCCD1}">
+              <a14:hiddenFill xmlns:a14="http://schemas.microsoft.com/office/drawing/2010/main">
+                <a:solidFill>
+                  <a:srgbClr val="FFFFFF"/>
+                </a:solidFill>
+              </a14:hiddenFill>
+            </a:ext>
+            <a:ext uri="{91240B29-F687-4F45-9708-019B960494DF}">
+              <a14:hiddenLine xmlns:a14="http://schemas.microsoft.com/office/drawing/2010/main" w="12700" cap="rnd">
+                <a:solidFill>
+                  <a:srgbClr val="000000"/>
+                </a:solidFill>
+                <a:round/>
+                <a:headEnd/>
+                <a:tailEnd/>
+              </a14:hiddenLine>
+            </a:ext>
+          </a:extLst>
+        </p:spPr>
+      </p:pic>
+      <p:pic>
+        <p:nvPicPr>
+          <p:cNvPr id="11" name="circle1">
+            <a:extLst>
+              <a:ext uri="{FF2B5EF4-FFF2-40B4-BE49-F238E27FC236}">
+                <a16:creationId xmlns:a16="http://schemas.microsoft.com/office/drawing/2014/main" id="{9354D81A-1828-C2FF-A45D-7DAFC50E5B9A}"/>
+              </a:ext>
+            </a:extLst>
+          </p:cNvPr>
+          <p:cNvPicPr>
+            <a:picLocks noChangeArrowheads="1"/>
+          </p:cNvPicPr>
+          <p:nvPr/>
+        </p:nvPicPr>
+        <p:blipFill>
+          <a:blip r:embed="rId4">
+            <a:extLst>
+              <a:ext uri="{28A0092B-C50C-407E-A947-70E740481C1C}">
+                <a14:useLocalDpi xmlns:a14="http://schemas.microsoft.com/office/drawing/2010/main" val="0"/>
+              </a:ext>
+            </a:extLst>
+          </a:blip>
+          <a:srcRect/>
+          <a:stretch>
+            <a:fillRect/>
+          </a:stretch>
+        </p:blipFill>
+        <p:spPr bwMode="auto">
+          <a:xfrm>
+            <a:off x="8833611" y="3216154"/>
+            <a:ext cx="844983" cy="437638"/>
+          </a:xfrm>
+          <a:prstGeom prst="rect">
+            <a:avLst/>
+          </a:prstGeom>
+          <a:noFill/>
+          <a:ln>
+            <a:noFill/>
+          </a:ln>
+          <a:extLst>
+            <a:ext uri="{909E8E84-426E-40DD-AFC4-6F175D3DCCD1}">
+              <a14:hiddenFill xmlns:a14="http://schemas.microsoft.com/office/drawing/2010/main">
+                <a:solidFill>
+                  <a:srgbClr val="FFFFFF"/>
+                </a:solidFill>
+              </a14:hiddenFill>
+            </a:ext>
+            <a:ext uri="{91240B29-F687-4F45-9708-019B960494DF}">
+              <a14:hiddenLine xmlns:a14="http://schemas.microsoft.com/office/drawing/2010/main" w="12700" cap="rnd">
+                <a:solidFill>
+                  <a:srgbClr val="000000"/>
+                </a:solidFill>
+                <a:round/>
+                <a:headEnd/>
+                <a:tailEnd/>
+              </a14:hiddenLine>
+            </a:ext>
+          </a:extLst>
+        </p:spPr>
+      </p:pic>
     </p:spTree>
     <p:extLst>
       <p:ext uri="{BB962C8B-B14F-4D97-AF65-F5344CB8AC3E}">
-        <p14:creationId xmlns:p14="http://schemas.microsoft.com/office/powerpoint/2010/main" val="173570699"/>
+        <p14:creationId xmlns:p14="http://schemas.microsoft.com/office/powerpoint/2010/main" val="2455677651"/>
       </p:ext>
     </p:extLst>
   </p:cSld>
